--- a/examples/sample_output.pptx
+++ b/examples/sample_output.pptx
@@ -13,8 +13,6 @@
     <p:sldId id="261" r:id="rId12"/>
     <p:sldId id="262" r:id="rId13"/>
     <p:sldId id="263" r:id="rId14"/>
-    <p:sldId id="264" r:id="rId15"/>
-    <p:sldId id="265" r:id="rId16"/>
   </p:sldIdLst>
   <p:sldSz cx="12191695" cy="6858000" type="screen4x3"/>
   <p:notesSz cx="6858000" cy="9144000"/>
@@ -3093,156 +3091,6 @@
     <p:bg>
       <p:bgPr>
         <a:solidFill>
-          <a:srgbClr val="1F3A68"/>
-        </a:solidFill>
-        <a:effectLst/>
-      </p:bgPr>
-    </p:bg>
-    <p:spTree>
-      <p:nvGrpSpPr>
-        <p:cNvPr id="1" name=""/>
-        <p:cNvGrpSpPr/>
-        <p:nvPr/>
-      </p:nvGrpSpPr>
-      <p:grpSpPr/>
-      <p:sp>
-        <p:nvSpPr>
-          <p:cNvPr id="2" name="TextBox 1"/>
-          <p:cNvSpPr txBox="1"/>
-          <p:nvPr/>
-        </p:nvSpPr>
-        <p:spPr>
-          <a:xfrm>
-            <a:off x="548640" y="1920240"/>
-            <a:ext cx="11094415" cy="1371600"/>
-          </a:xfrm>
-          <a:prstGeom prst="rect">
-            <a:avLst/>
-          </a:prstGeom>
-          <a:noFill/>
-          <a:ln>
-            <a:noFill/>
-          </a:ln>
-        </p:spPr>
-        <p:txBody>
-          <a:bodyPr wrap="square" anchor="ctr" lIns="0" rIns="0" tIns="0" bIns="0">
-            <a:spAutoFit/>
-          </a:bodyPr>
-          <a:lstStyle/>
-          <a:p>
-            <a:pPr algn="ctr"/>
-            <a:r>
-              <a:rPr sz="4000" b="1">
-                <a:solidFill>
-                  <a:srgbClr val="FFFFFF"/>
-                </a:solidFill>
-                <a:latin typeface="標楷體"/>
-              </a:rPr>
-              <a:t>逃漏稅答辯簡報 (範例)</a:t>
-            </a:r>
-          </a:p>
-        </p:txBody>
-      </p:sp>
-      <p:sp>
-        <p:nvSpPr>
-          <p:cNvPr id="3" name="TextBox 2"/>
-          <p:cNvSpPr txBox="1"/>
-          <p:nvPr/>
-        </p:nvSpPr>
-        <p:spPr>
-          <a:xfrm>
-            <a:off x="548640" y="3771900"/>
-            <a:ext cx="11094415" cy="2400300"/>
-          </a:xfrm>
-          <a:prstGeom prst="rect">
-            <a:avLst/>
-          </a:prstGeom>
-          <a:noFill/>
-          <a:ln>
-            <a:noFill/>
-          </a:ln>
-        </p:spPr>
-        <p:txBody>
-          <a:bodyPr wrap="square" anchor="t" lIns="0" rIns="0" tIns="0" bIns="0">
-            <a:spAutoFit/>
-          </a:bodyPr>
-          <a:lstStyle/>
-          <a:p>
-            <a:pPr algn="ctr"/>
-            <a:r>
-              <a:rPr sz="2000" b="0">
-                <a:solidFill>
-                  <a:srgbClr val="FFFFFF"/>
-                </a:solidFill>
-                <a:latin typeface="標楷體"/>
-              </a:rPr>
-              <a:t>案號：高雄地院 115 年度金重訴字第 1 號</a:t>
-            </a:r>
-          </a:p>
-          <a:p>
-            <a:pPr algn="ctr"/>
-            <a:r>
-              <a:rPr sz="2000" b="0">
-                <a:solidFill>
-                  <a:srgbClr val="FFFFFF"/>
-                </a:solidFill>
-                <a:latin typeface="標楷體"/>
-              </a:rPr>
-              <a:t>被告：謝 OO、謝 XX</a:t>
-            </a:r>
-          </a:p>
-          <a:p>
-            <a:pPr algn="ctr"/>
-            <a:r>
-              <a:rPr sz="2000" b="0">
-                <a:solidFill>
-                  <a:srgbClr val="FFFFFF"/>
-                </a:solidFill>
-                <a:latin typeface="標楷體"/>
-              </a:rPr>
-              <a:t>起訴罪名：稅捐稽徵法第 41 條</a:t>
-            </a:r>
-          </a:p>
-          <a:p>
-            <a:pPr algn="ctr"/>
-            <a:r>
-              <a:rPr sz="2000" b="0">
-                <a:solidFill>
-                  <a:srgbClr val="FFFFFF"/>
-                </a:solidFill>
-                <a:latin typeface="標楷體"/>
-              </a:rPr>
-              <a:t>辯護人：OO 法律事務所</a:t>
-            </a:r>
-          </a:p>
-          <a:p>
-            <a:pPr algn="ctr"/>
-            <a:r>
-              <a:rPr sz="2000" b="0">
-                <a:solidFill>
-                  <a:srgbClr val="FFFFFF"/>
-                </a:solidFill>
-                <a:latin typeface="標楷體"/>
-              </a:rPr>
-              <a:t>報告日期：2026-04-17</a:t>
-            </a:r>
-          </a:p>
-        </p:txBody>
-      </p:sp>
-    </p:spTree>
-  </p:cSld>
-  <p:clrMapOvr>
-    <a:masterClrMapping/>
-  </p:clrMapOvr>
-</p:sld>
-</file>
-
-<file path=ppt/slides/slide10.xml><?xml version="1.0" encoding="utf-8"?>
-<p:sld xmlns:a="http://schemas.openxmlformats.org/drawingml/2006/main" xmlns:p="http://schemas.openxmlformats.org/presentationml/2006/main" xmlns:r="http://schemas.openxmlformats.org/officeDocument/2006/relationships">
-  <p:cSld>
-    <p:bg>
-      <p:bgPr>
-        <a:solidFill>
           <a:srgbClr val="FFFFFF"/>
         </a:solidFill>
         <a:effectLst/>
@@ -3257,90 +3105,315 @@
       <p:grpSpPr/>
       <p:sp>
         <p:nvSpPr>
-          <p:cNvPr id="2" name="TextBox 1"/>
+          <p:cNvPr id="2" name="Rectangle 1"/>
+          <p:cNvSpPr/>
+          <p:nvPr/>
+        </p:nvSpPr>
+        <p:spPr>
+          <a:xfrm>
+            <a:off x="0" y="0"/>
+            <a:ext cx="73152" cy="6858000"/>
+          </a:xfrm>
+          <a:prstGeom prst="rect">
+            <a:avLst/>
+          </a:prstGeom>
+          <a:solidFill>
+            <a:srgbClr val="1A3C6E"/>
+          </a:solidFill>
+          <a:ln>
+            <a:noFill/>
+          </a:ln>
+        </p:spPr>
+        <p:style>
+          <a:lnRef idx="1">
+            <a:schemeClr val="accent1"/>
+          </a:lnRef>
+          <a:fillRef idx="3">
+            <a:schemeClr val="accent1"/>
+          </a:fillRef>
+          <a:effectRef idx="2">
+            <a:schemeClr val="accent1"/>
+          </a:effectRef>
+          <a:fontRef idx="minor">
+            <a:schemeClr val="lt1"/>
+          </a:fontRef>
+        </p:style>
+        <p:txBody>
+          <a:bodyPr rtlCol="0" anchor="ctr"/>
+          <a:lstStyle/>
+          <a:p>
+            <a:pPr algn="ctr"/>
+          </a:p>
+        </p:txBody>
+      </p:sp>
+      <p:sp>
+        <p:nvSpPr>
+          <p:cNvPr id="3" name="TextBox 2"/>
           <p:cNvSpPr txBox="1"/>
           <p:nvPr/>
         </p:nvSpPr>
         <p:spPr>
           <a:xfrm>
-            <a:off x="548640" y="457200"/>
-            <a:ext cx="11094415" cy="731520"/>
+            <a:off x="1097280" y="1371600"/>
+            <a:ext cx="10058400" cy="1371600"/>
           </a:xfrm>
           <a:prstGeom prst="rect">
             <a:avLst/>
           </a:prstGeom>
           <a:noFill/>
-          <a:ln>
-            <a:noFill/>
-          </a:ln>
-        </p:spPr>
-        <p:txBody>
-          <a:bodyPr wrap="square" anchor="t" lIns="0" rIns="0" tIns="0" bIns="0">
+        </p:spPr>
+        <p:txBody>
+          <a:bodyPr wrap="square" anchor="t" lIns="45720" rIns="45720" tIns="18288" bIns="18288">
             <a:spAutoFit/>
           </a:bodyPr>
           <a:lstStyle/>
           <a:p>
             <a:pPr algn="l"/>
             <a:r>
-              <a:rPr sz="2800" b="1">
-                <a:solidFill>
-                  <a:srgbClr val="1F3A68"/>
-                </a:solidFill>
-                <a:latin typeface="標楷體"/>
-              </a:rPr>
-              <a:t>附錄：本簡報引用判決清單（均經 dr-lawbot 驗證）</a:t>
-            </a:r>
-          </a:p>
-        </p:txBody>
-      </p:sp>
-      <p:sp>
-        <p:nvSpPr>
-          <p:cNvPr id="3" name="TextBox 2"/>
+              <a:rPr sz="3600" b="1">
+                <a:solidFill>
+                  <a:srgbClr val="1A3C6E"/>
+                </a:solidFill>
+                <a:latin typeface="Times New Roman"/>
+                <a:ea typeface="標楷體"/>
+              </a:rPr>
+              <a:t>臺灣OO地方法院</a:t>
+            </a:r>
+            <a:r>
+              <a:rPr sz="3600" b="1">
+                <a:solidFill>
+                  <a:srgbClr val="1A3C6E"/>
+                </a:solidFill>
+                <a:latin typeface="Times New Roman"/>
+                <a:ea typeface="標楷體"/>
+              </a:rPr>
+              <a:t> OOO 年度金重訴字第 OO 號</a:t>
+            </a:r>
+          </a:p>
+        </p:txBody>
+      </p:sp>
+      <p:sp>
+        <p:nvSpPr>
+          <p:cNvPr id="4" name="TextBox 3"/>
           <p:cNvSpPr txBox="1"/>
           <p:nvPr/>
         </p:nvSpPr>
         <p:spPr>
           <a:xfrm>
-            <a:off x="548640" y="1554480"/>
-            <a:ext cx="11094415" cy="5029200"/>
+            <a:off x="1097280" y="2743200"/>
+            <a:ext cx="9144000" cy="548640"/>
           </a:xfrm>
           <a:prstGeom prst="rect">
             <a:avLst/>
           </a:prstGeom>
           <a:noFill/>
+        </p:spPr>
+        <p:txBody>
+          <a:bodyPr wrap="square" anchor="t" lIns="45720" rIns="45720" tIns="18288" bIns="18288">
+            <a:spAutoFit/>
+          </a:bodyPr>
+          <a:lstStyle/>
+          <a:p>
+            <a:pPr algn="l"/>
+            <a:r>
+              <a:rPr sz="2800" b="0">
+                <a:solidFill>
+                  <a:srgbClr val="333333"/>
+                </a:solidFill>
+                <a:latin typeface="Times New Roman"/>
+                <a:ea typeface="標楷體"/>
+              </a:rPr>
+              <a:t>被告 A、B、C</a:t>
+            </a:r>
+          </a:p>
+        </p:txBody>
+      </p:sp>
+      <p:sp>
+        <p:nvSpPr>
+          <p:cNvPr id="5" name="TextBox 4"/>
+          <p:cNvSpPr txBox="1"/>
+          <p:nvPr/>
+        </p:nvSpPr>
+        <p:spPr>
+          <a:xfrm>
+            <a:off x="1097280" y="3566160"/>
+            <a:ext cx="9144000" cy="548640"/>
+          </a:xfrm>
+          <a:prstGeom prst="rect">
+            <a:avLst/>
+          </a:prstGeom>
+          <a:noFill/>
+        </p:spPr>
+        <p:txBody>
+          <a:bodyPr wrap="square" anchor="t" lIns="45720" rIns="45720" tIns="18288" bIns="18288">
+            <a:spAutoFit/>
+          </a:bodyPr>
+          <a:lstStyle/>
+          <a:p>
+            <a:pPr algn="l"/>
+            <a:r>
+              <a:rPr sz="2600" b="0">
+                <a:solidFill>
+                  <a:srgbClr val="333333"/>
+                </a:solidFill>
+                <a:latin typeface="Times New Roman"/>
+                <a:ea typeface="標楷體"/>
+              </a:rPr>
+              <a:t>逃漏稅捐罪部分之答辯方向</a:t>
+            </a:r>
+          </a:p>
+        </p:txBody>
+      </p:sp>
+      <p:sp>
+        <p:nvSpPr>
+          <p:cNvPr id="6" name="Rectangle 5"/>
+          <p:cNvSpPr/>
+          <p:nvPr/>
+        </p:nvSpPr>
+        <p:spPr>
+          <a:xfrm>
+            <a:off x="1097280" y="4572000"/>
+            <a:ext cx="4572000" cy="18288"/>
+          </a:xfrm>
+          <a:prstGeom prst="rect">
+            <a:avLst/>
+          </a:prstGeom>
+          <a:solidFill>
+            <a:srgbClr val="1A3C6E"/>
+          </a:solidFill>
           <a:ln>
             <a:noFill/>
           </a:ln>
         </p:spPr>
-        <p:txBody>
-          <a:bodyPr wrap="square" anchor="t" lIns="0" rIns="0" tIns="0" bIns="0">
+        <p:style>
+          <a:lnRef idx="1">
+            <a:schemeClr val="accent1"/>
+          </a:lnRef>
+          <a:fillRef idx="3">
+            <a:schemeClr val="accent1"/>
+          </a:fillRef>
+          <a:effectRef idx="2">
+            <a:schemeClr val="accent1"/>
+          </a:effectRef>
+          <a:fontRef idx="minor">
+            <a:schemeClr val="lt1"/>
+          </a:fontRef>
+        </p:style>
+        <p:txBody>
+          <a:bodyPr rtlCol="0" anchor="ctr"/>
+          <a:lstStyle/>
+          <a:p>
+            <a:pPr algn="ctr"/>
+          </a:p>
+        </p:txBody>
+      </p:sp>
+      <p:sp>
+        <p:nvSpPr>
+          <p:cNvPr id="7" name="TextBox 6"/>
+          <p:cNvSpPr txBox="1"/>
+          <p:nvPr/>
+        </p:nvSpPr>
+        <p:spPr>
+          <a:xfrm>
+            <a:off x="1097280" y="4937760"/>
+            <a:ext cx="9144000" cy="1280160"/>
+          </a:xfrm>
+          <a:prstGeom prst="rect">
+            <a:avLst/>
+          </a:prstGeom>
+          <a:noFill/>
+        </p:spPr>
+        <p:txBody>
+          <a:bodyPr wrap="square" anchor="t" lIns="45720" rIns="45720" tIns="18288" bIns="18288">
             <a:spAutoFit/>
           </a:bodyPr>
           <a:lstStyle/>
           <a:p>
             <a:pPr algn="l"/>
             <a:r>
-              <a:rPr sz="1400" b="0">
-                <a:solidFill>
-                  <a:srgbClr val="333333"/>
-                </a:solidFill>
-                <a:latin typeface="標楷體"/>
-              </a:rPr>
-              <a:t>1. 最高行政法院 107 年度判字第 369 號判決（綜合所得稅）
-    https://api.dr-lawbot.com/api/search?q=107+判字+369</a:t>
+              <a:rPr sz="1800" b="0">
+                <a:solidFill>
+                  <a:srgbClr val="666666"/>
+                </a:solidFill>
+                <a:latin typeface="Times New Roman"/>
+                <a:ea typeface="標楷體"/>
+              </a:rPr>
+              <a:t>中華民國 OOO 年 O 月 O 日</a:t>
             </a:r>
           </a:p>
           <a:p>
             <a:pPr algn="l"/>
             <a:r>
-              <a:rPr sz="1400" b="0">
-                <a:solidFill>
-                  <a:srgbClr val="333333"/>
-                </a:solidFill>
-                <a:latin typeface="標楷體"/>
-              </a:rPr>
-              <a:t>2. 最高行政法院 109 年度上字第 993 號判決（營業稅）
-    https://api.dr-lawbot.com/api/search?q=109+上字+993</a:t>
+              <a:rPr sz="1800" b="0">
+                <a:solidFill>
+                  <a:srgbClr val="666666"/>
+                </a:solidFill>
+                <a:latin typeface="Times New Roman"/>
+                <a:ea typeface="標楷體"/>
+              </a:rPr>
+              <a:t>王 X 律師</a:t>
+            </a:r>
+          </a:p>
+          <a:p>
+            <a:pPr algn="l"/>
+            <a:r>
+              <a:rPr sz="1800" b="0">
+                <a:solidFill>
+                  <a:srgbClr val="666666"/>
+                </a:solidFill>
+                <a:latin typeface="Times New Roman"/>
+                <a:ea typeface="標楷體"/>
+              </a:rPr>
+              <a:t>黃 X 律師</a:t>
+            </a:r>
+          </a:p>
+          <a:p>
+            <a:pPr algn="l"/>
+            <a:r>
+              <a:rPr sz="1800" b="0">
+                <a:solidFill>
+                  <a:srgbClr val="666666"/>
+                </a:solidFill>
+                <a:latin typeface="Times New Roman"/>
+                <a:ea typeface="標楷體"/>
+              </a:rPr>
+              <a:t>蔡 X 律師</a:t>
+            </a:r>
+          </a:p>
+        </p:txBody>
+      </p:sp>
+      <p:sp>
+        <p:nvSpPr>
+          <p:cNvPr id="8" name="TextBox 7"/>
+          <p:cNvSpPr txBox="1"/>
+          <p:nvPr/>
+        </p:nvSpPr>
+        <p:spPr>
+          <a:xfrm>
+            <a:off x="10789920" y="6446520"/>
+            <a:ext cx="1097280" cy="320040"/>
+          </a:xfrm>
+          <a:prstGeom prst="rect">
+            <a:avLst/>
+          </a:prstGeom>
+          <a:noFill/>
+        </p:spPr>
+        <p:txBody>
+          <a:bodyPr wrap="square" anchor="t" lIns="45720" rIns="45720" tIns="18288" bIns="18288">
+            <a:spAutoFit/>
+          </a:bodyPr>
+          <a:lstStyle/>
+          <a:p>
+            <a:pPr algn="r"/>
+            <a:r>
+              <a:rPr sz="900" b="0">
+                <a:solidFill>
+                  <a:srgbClr val="666666"/>
+                </a:solidFill>
+                <a:latin typeface="Times New Roman"/>
+                <a:ea typeface="標楷體"/>
+              </a:rPr>
+              <a:t>1</a:t>
             </a:r>
           </a:p>
         </p:txBody>
@@ -3373,100 +3446,298 @@
       <p:grpSpPr/>
       <p:sp>
         <p:nvSpPr>
-          <p:cNvPr id="2" name="TextBox 1"/>
+          <p:cNvPr id="2" name="Rectangle 1"/>
+          <p:cNvSpPr/>
+          <p:nvPr/>
+        </p:nvSpPr>
+        <p:spPr>
+          <a:xfrm>
+            <a:off x="0" y="0"/>
+            <a:ext cx="73152" cy="6858000"/>
+          </a:xfrm>
+          <a:prstGeom prst="rect">
+            <a:avLst/>
+          </a:prstGeom>
+          <a:solidFill>
+            <a:srgbClr val="1A3C6E"/>
+          </a:solidFill>
+          <a:ln>
+            <a:noFill/>
+          </a:ln>
+        </p:spPr>
+        <p:style>
+          <a:lnRef idx="1">
+            <a:schemeClr val="accent1"/>
+          </a:lnRef>
+          <a:fillRef idx="3">
+            <a:schemeClr val="accent1"/>
+          </a:fillRef>
+          <a:effectRef idx="2">
+            <a:schemeClr val="accent1"/>
+          </a:effectRef>
+          <a:fontRef idx="minor">
+            <a:schemeClr val="lt1"/>
+          </a:fontRef>
+        </p:style>
+        <p:txBody>
+          <a:bodyPr rtlCol="0" anchor="ctr"/>
+          <a:lstStyle/>
+          <a:p>
+            <a:pPr algn="ctr"/>
+          </a:p>
+        </p:txBody>
+      </p:sp>
+      <p:sp>
+        <p:nvSpPr>
+          <p:cNvPr id="3" name="TextBox 2"/>
           <p:cNvSpPr txBox="1"/>
           <p:nvPr/>
         </p:nvSpPr>
         <p:spPr>
           <a:xfrm>
-            <a:off x="548640" y="457200"/>
-            <a:ext cx="11094415" cy="822960"/>
+            <a:off x="548640" y="228600"/>
+            <a:ext cx="10972800" cy="731520"/>
           </a:xfrm>
           <a:prstGeom prst="rect">
             <a:avLst/>
           </a:prstGeom>
           <a:noFill/>
+        </p:spPr>
+        <p:txBody>
+          <a:bodyPr wrap="square" anchor="t" lIns="45720" rIns="45720" tIns="18288" bIns="18288">
+            <a:spAutoFit/>
+          </a:bodyPr>
+          <a:lstStyle/>
+          <a:p>
+            <a:pPr algn="l"/>
+            <a:r>
+              <a:rPr sz="3000" b="1">
+                <a:solidFill>
+                  <a:srgbClr val="1A3C6E"/>
+                </a:solidFill>
+                <a:latin typeface="Times New Roman"/>
+                <a:ea typeface="標楷體"/>
+              </a:rPr>
+              <a:t>答辯架構總覽</a:t>
+            </a:r>
+          </a:p>
+        </p:txBody>
+      </p:sp>
+      <p:sp>
+        <p:nvSpPr>
+          <p:cNvPr id="4" name="Rectangle 3"/>
+          <p:cNvSpPr/>
+          <p:nvPr/>
+        </p:nvSpPr>
+        <p:spPr>
+          <a:xfrm>
+            <a:off x="548640" y="914400"/>
+            <a:ext cx="10972800" cy="18288"/>
+          </a:xfrm>
+          <a:prstGeom prst="rect">
+            <a:avLst/>
+          </a:prstGeom>
+          <a:solidFill>
+            <a:srgbClr val="1A3C6E"/>
+          </a:solidFill>
           <a:ln>
             <a:noFill/>
           </a:ln>
         </p:spPr>
-        <p:txBody>
-          <a:bodyPr wrap="square" anchor="t" lIns="0" rIns="0" tIns="0" bIns="0">
-            <a:spAutoFit/>
-          </a:bodyPr>
-          <a:lstStyle/>
-          <a:p>
-            <a:pPr algn="l"/>
-            <a:r>
-              <a:rPr sz="2800" b="1">
-                <a:solidFill>
-                  <a:srgbClr val="1F3A68"/>
-                </a:solidFill>
-                <a:latin typeface="標楷體"/>
-              </a:rPr>
-              <a:t>目次</a:t>
-            </a:r>
-          </a:p>
-        </p:txBody>
-      </p:sp>
-      <p:sp>
-        <p:nvSpPr>
-          <p:cNvPr id="3" name="TextBox 2"/>
+        <p:style>
+          <a:lnRef idx="1">
+            <a:schemeClr val="accent1"/>
+          </a:lnRef>
+          <a:fillRef idx="3">
+            <a:schemeClr val="accent1"/>
+          </a:fillRef>
+          <a:effectRef idx="2">
+            <a:schemeClr val="accent1"/>
+          </a:effectRef>
+          <a:fontRef idx="minor">
+            <a:schemeClr val="lt1"/>
+          </a:fontRef>
+        </p:style>
+        <p:txBody>
+          <a:bodyPr rtlCol="0" anchor="ctr"/>
+          <a:lstStyle/>
+          <a:p>
+            <a:pPr algn="ctr"/>
+          </a:p>
+        </p:txBody>
+      </p:sp>
+      <p:sp>
+        <p:nvSpPr>
+          <p:cNvPr id="5" name="TextBox 4"/>
           <p:cNvSpPr txBox="1"/>
           <p:nvPr/>
         </p:nvSpPr>
         <p:spPr>
           <a:xfrm>
-            <a:off x="548640" y="1508760"/>
-            <a:ext cx="11094415" cy="4800600"/>
+            <a:off x="731520" y="1280160"/>
+            <a:ext cx="10972800" cy="5029200"/>
           </a:xfrm>
           <a:prstGeom prst="rect">
             <a:avLst/>
           </a:prstGeom>
           <a:noFill/>
-          <a:ln>
-            <a:noFill/>
-          </a:ln>
-        </p:spPr>
-        <p:txBody>
-          <a:bodyPr wrap="square" anchor="t" lIns="0" rIns="0" tIns="0" bIns="0">
+        </p:spPr>
+        <p:txBody>
+          <a:bodyPr wrap="square" anchor="t" lIns="45720" rIns="45720" tIns="18288" bIns="18288">
             <a:spAutoFit/>
           </a:bodyPr>
           <a:lstStyle/>
           <a:p>
             <a:pPr algn="l"/>
             <a:r>
-              <a:rPr sz="1800" b="0">
+              <a:rPr sz="1700" b="0">
                 <a:solidFill>
                   <a:srgbClr val="333333"/>
                 </a:solidFill>
-                <a:latin typeface="標楷體"/>
-              </a:rPr>
-              <a:t>壹、犯後態度</a:t>
+                <a:latin typeface="Times New Roman"/>
+                <a:ea typeface="標楷體"/>
+              </a:rPr>
+              <a:t>壹、補報稅事實背景</a:t>
             </a:r>
           </a:p>
           <a:p>
             <a:pPr algn="l"/>
             <a:r>
-              <a:rPr sz="1800" b="0">
+              <a:rPr sz="1700" b="0">
                 <a:solidFill>
                   <a:srgbClr val="333333"/>
                 </a:solidFill>
-                <a:latin typeface="標楷體"/>
-              </a:rPr>
-              <a:t>參、重複課稅</a:t>
+                <a:latin typeface="Times New Roman"/>
+                <a:ea typeface="標楷體"/>
+              </a:rPr>
+              <a:t>貳、程序爭點 — 稅局計算表欠缺證據能力（刑訴§159）</a:t>
             </a:r>
           </a:p>
           <a:p>
             <a:pPr algn="l"/>
             <a:r>
-              <a:rPr sz="1800" b="0">
+              <a:rPr sz="1700" b="0">
                 <a:solidFill>
                   <a:srgbClr val="333333"/>
                 </a:solidFill>
-                <a:latin typeface="標楷體"/>
-              </a:rPr>
-              <a:t>伍、核課期間</a:t>
+                <a:latin typeface="Times New Roman"/>
+                <a:ea typeface="標楷體"/>
+              </a:rPr>
+              <a:t>參、重複課稅 — 檢方計算方式之錯誤且重複</a:t>
+            </a:r>
+          </a:p>
+          <a:p>
+            <a:pPr algn="l"/>
+            <a:r>
+              <a:rPr sz="1700" b="0">
+                <a:solidFill>
+                  <a:srgbClr val="333333"/>
+                </a:solidFill>
+                <a:latin typeface="Times New Roman"/>
+                <a:ea typeface="標楷體"/>
+              </a:rPr>
+              <a:t>肆、亞科公司所得分配方式被檢方擅自變更</a:t>
+            </a:r>
+          </a:p>
+          <a:p>
+            <a:pPr algn="l"/>
+            <a:r>
+              <a:rPr sz="1700" b="0">
+                <a:solidFill>
+                  <a:srgbClr val="333333"/>
+                </a:solidFill>
+                <a:latin typeface="Times New Roman"/>
+                <a:ea typeface="標楷體"/>
+              </a:rPr>
+              <a:t>伍、逃漏稅額計算來源不透明</a:t>
+            </a:r>
+          </a:p>
+          <a:p>
+            <a:pPr algn="l"/>
+            <a:r>
+              <a:rPr sz="1700" b="0">
+                <a:solidFill>
+                  <a:srgbClr val="333333"/>
+                </a:solidFill>
+                <a:latin typeface="Times New Roman"/>
+                <a:ea typeface="標楷體"/>
+              </a:rPr>
+              <a:t>陸、國稅局估算至少更正 3 次</a:t>
+            </a:r>
+          </a:p>
+          <a:p>
+            <a:pPr algn="l"/>
+            <a:r>
+              <a:rPr sz="1700" b="0">
+                <a:solidFill>
+                  <a:srgbClr val="333333"/>
+                </a:solidFill>
+                <a:latin typeface="Times New Roman"/>
+                <a:ea typeface="標楷體"/>
+              </a:rPr>
+              <a:t>柒、所得性質爭議 — 合夥關係為真</a:t>
+            </a:r>
+          </a:p>
+          <a:p>
+            <a:pPr algn="l"/>
+            <a:r>
+              <a:rPr sz="1700" b="0">
+                <a:solidFill>
+                  <a:srgbClr val="333333"/>
+                </a:solidFill>
+                <a:latin typeface="Times New Roman"/>
+                <a:ea typeface="標楷體"/>
+              </a:rPr>
+              <a:t>捌、卷內帳冊多有模糊</a:t>
+            </a:r>
+          </a:p>
+          <a:p>
+            <a:pPr algn="l"/>
+            <a:r>
+              <a:rPr sz="1700" b="0">
+                <a:solidFill>
+                  <a:srgbClr val="333333"/>
+                </a:solidFill>
+                <a:latin typeface="Times New Roman"/>
+                <a:ea typeface="標楷體"/>
+              </a:rPr>
+              <a:t>結論</a:t>
+            </a:r>
+          </a:p>
+        </p:txBody>
+      </p:sp>
+      <p:sp>
+        <p:nvSpPr>
+          <p:cNvPr id="6" name="TextBox 5"/>
+          <p:cNvSpPr txBox="1"/>
+          <p:nvPr/>
+        </p:nvSpPr>
+        <p:spPr>
+          <a:xfrm>
+            <a:off x="10789920" y="6446520"/>
+            <a:ext cx="1097280" cy="320040"/>
+          </a:xfrm>
+          <a:prstGeom prst="rect">
+            <a:avLst/>
+          </a:prstGeom>
+          <a:noFill/>
+        </p:spPr>
+        <p:txBody>
+          <a:bodyPr wrap="square" anchor="t" lIns="45720" rIns="45720" tIns="18288" bIns="18288">
+            <a:spAutoFit/>
+          </a:bodyPr>
+          <a:lstStyle/>
+          <a:p>
+            <a:pPr algn="r"/>
+            <a:r>
+              <a:rPr sz="900" b="0">
+                <a:solidFill>
+                  <a:srgbClr val="666666"/>
+                </a:solidFill>
+                <a:latin typeface="Times New Roman"/>
+                <a:ea typeface="標楷體"/>
+              </a:rPr>
+              <a:t>2</a:t>
             </a:r>
           </a:p>
         </p:txBody>
@@ -3485,7 +3756,7 @@
     <p:bg>
       <p:bgPr>
         <a:solidFill>
-          <a:srgbClr val="1F3A68"/>
+          <a:srgbClr val="FFFFFF"/>
         </a:solidFill>
         <a:effectLst/>
       </p:bgPr>
@@ -3499,38 +3770,414 @@
       <p:grpSpPr/>
       <p:sp>
         <p:nvSpPr>
-          <p:cNvPr id="2" name="TextBox 1"/>
+          <p:cNvPr id="2" name="Rectangle 1"/>
+          <p:cNvSpPr/>
+          <p:nvPr/>
+        </p:nvSpPr>
+        <p:spPr>
+          <a:xfrm>
+            <a:off x="0" y="0"/>
+            <a:ext cx="73152" cy="6858000"/>
+          </a:xfrm>
+          <a:prstGeom prst="rect">
+            <a:avLst/>
+          </a:prstGeom>
+          <a:solidFill>
+            <a:srgbClr val="1A3C6E"/>
+          </a:solidFill>
+          <a:ln>
+            <a:noFill/>
+          </a:ln>
+        </p:spPr>
+        <p:style>
+          <a:lnRef idx="1">
+            <a:schemeClr val="accent1"/>
+          </a:lnRef>
+          <a:fillRef idx="3">
+            <a:schemeClr val="accent1"/>
+          </a:fillRef>
+          <a:effectRef idx="2">
+            <a:schemeClr val="accent1"/>
+          </a:effectRef>
+          <a:fontRef idx="minor">
+            <a:schemeClr val="lt1"/>
+          </a:fontRef>
+        </p:style>
+        <p:txBody>
+          <a:bodyPr rtlCol="0" anchor="ctr"/>
+          <a:lstStyle/>
+          <a:p>
+            <a:pPr algn="ctr"/>
+          </a:p>
+        </p:txBody>
+      </p:sp>
+      <p:sp>
+        <p:nvSpPr>
+          <p:cNvPr id="3" name="TextBox 2"/>
           <p:cNvSpPr txBox="1"/>
           <p:nvPr/>
         </p:nvSpPr>
         <p:spPr>
           <a:xfrm>
-            <a:off x="548640" y="2400300"/>
-            <a:ext cx="11094415" cy="2057400"/>
+            <a:off x="548640" y="228600"/>
+            <a:ext cx="10972800" cy="731520"/>
           </a:xfrm>
           <a:prstGeom prst="rect">
             <a:avLst/>
           </a:prstGeom>
           <a:noFill/>
+        </p:spPr>
+        <p:txBody>
+          <a:bodyPr wrap="square" anchor="t" lIns="45720" rIns="45720" tIns="18288" bIns="18288">
+            <a:spAutoFit/>
+          </a:bodyPr>
+          <a:lstStyle/>
+          <a:p>
+            <a:pPr algn="l"/>
+            <a:r>
+              <a:rPr sz="3000" b="1">
+                <a:solidFill>
+                  <a:srgbClr val="1A3C6E"/>
+                </a:solidFill>
+                <a:latin typeface="Times New Roman"/>
+                <a:ea typeface="標楷體"/>
+              </a:rPr>
+              <a:t>貳、程序爭點 — 稅局計算表欠缺證據能力（刑訴§159）</a:t>
+            </a:r>
+          </a:p>
+        </p:txBody>
+      </p:sp>
+      <p:sp>
+        <p:nvSpPr>
+          <p:cNvPr id="4" name="Rectangle 3"/>
+          <p:cNvSpPr/>
+          <p:nvPr/>
+        </p:nvSpPr>
+        <p:spPr>
+          <a:xfrm>
+            <a:off x="548640" y="914400"/>
+            <a:ext cx="10972800" cy="18288"/>
+          </a:xfrm>
+          <a:prstGeom prst="rect">
+            <a:avLst/>
+          </a:prstGeom>
+          <a:solidFill>
+            <a:srgbClr val="1A3C6E"/>
+          </a:solidFill>
           <a:ln>
             <a:noFill/>
           </a:ln>
         </p:spPr>
-        <p:txBody>
-          <a:bodyPr wrap="square" anchor="ctr" lIns="0" rIns="0" tIns="0" bIns="0">
+        <p:style>
+          <a:lnRef idx="1">
+            <a:schemeClr val="accent1"/>
+          </a:lnRef>
+          <a:fillRef idx="3">
+            <a:schemeClr val="accent1"/>
+          </a:fillRef>
+          <a:effectRef idx="2">
+            <a:schemeClr val="accent1"/>
+          </a:effectRef>
+          <a:fontRef idx="minor">
+            <a:schemeClr val="lt1"/>
+          </a:fontRef>
+        </p:style>
+        <p:txBody>
+          <a:bodyPr rtlCol="0" anchor="ctr"/>
+          <a:lstStyle/>
+          <a:p>
+            <a:pPr algn="ctr"/>
+          </a:p>
+        </p:txBody>
+      </p:sp>
+      <p:sp>
+        <p:nvSpPr>
+          <p:cNvPr id="5" name="TextBox 4"/>
+          <p:cNvSpPr txBox="1"/>
+          <p:nvPr/>
+        </p:nvSpPr>
+        <p:spPr>
+          <a:xfrm>
+            <a:off x="731520" y="1143000"/>
+            <a:ext cx="10972800" cy="411480"/>
+          </a:xfrm>
+          <a:prstGeom prst="rect">
+            <a:avLst/>
+          </a:prstGeom>
+          <a:noFill/>
+        </p:spPr>
+        <p:txBody>
+          <a:bodyPr wrap="square" anchor="t" lIns="45720" rIns="45720" tIns="18288" bIns="18288">
             <a:spAutoFit/>
           </a:bodyPr>
           <a:lstStyle/>
           <a:p>
-            <a:pPr algn="ctr"/>
-            <a:r>
-              <a:rPr sz="3600" b="1">
-                <a:solidFill>
-                  <a:srgbClr val="FFFFFF"/>
-                </a:solidFill>
-                <a:latin typeface="標楷體"/>
-              </a:rPr>
-              <a:t>壹、犯後態度</a:t>
+            <a:pPr algn="l"/>
+            <a:r>
+              <a:rPr sz="1800" b="1">
+                <a:solidFill>
+                  <a:srgbClr val="8B0000"/>
+                </a:solidFill>
+                <a:latin typeface="Times New Roman"/>
+                <a:ea typeface="標楷體"/>
+              </a:rPr>
+              <a:t>核心主張</a:t>
+            </a:r>
+          </a:p>
+        </p:txBody>
+      </p:sp>
+      <p:sp>
+        <p:nvSpPr>
+          <p:cNvPr id="6" name="TextBox 5"/>
+          <p:cNvSpPr txBox="1"/>
+          <p:nvPr/>
+        </p:nvSpPr>
+        <p:spPr>
+          <a:xfrm>
+            <a:off x="914400" y="1554480"/>
+            <a:ext cx="10789920" cy="1508760"/>
+          </a:xfrm>
+          <a:prstGeom prst="rect">
+            <a:avLst/>
+          </a:prstGeom>
+          <a:noFill/>
+        </p:spPr>
+        <p:txBody>
+          <a:bodyPr wrap="square" anchor="t" lIns="45720" rIns="45720" tIns="18288" bIns="18288">
+            <a:spAutoFit/>
+          </a:bodyPr>
+          <a:lstStyle/>
+          <a:p>
+            <a:pPr algn="l"/>
+            <a:r>
+              <a:rPr sz="1700" b="0">
+                <a:solidFill>
+                  <a:srgbClr val="333333"/>
+                </a:solidFill>
+                <a:latin typeface="Times New Roman"/>
+                <a:ea typeface="標楷體"/>
+              </a:rPr>
+              <a:t>• </a:t>
+            </a:r>
+            <a:r>
+              <a:rPr sz="1700" b="0">
+                <a:solidFill>
+                  <a:srgbClr val="333333"/>
+                </a:solidFill>
+                <a:latin typeface="Times New Roman"/>
+                <a:ea typeface="標楷體"/>
+              </a:rPr>
+              <a:t>起訴書所援引國稅局逃漏稅額估算表（附件五、六、七）及相關函文</a:t>
+            </a:r>
+          </a:p>
+          <a:p>
+            <a:pPr algn="l"/>
+            <a:r>
+              <a:rPr sz="1700" b="0">
+                <a:solidFill>
+                  <a:srgbClr val="333333"/>
+                </a:solidFill>
+                <a:latin typeface="Times New Roman"/>
+                <a:ea typeface="標楷體"/>
+              </a:rPr>
+              <a:t>• </a:t>
+            </a:r>
+            <a:r>
+              <a:rPr sz="1700" b="0">
+                <a:solidFill>
+                  <a:srgbClr val="333333"/>
+                </a:solidFill>
+                <a:latin typeface="Times New Roman"/>
+                <a:ea typeface="標楷體"/>
+              </a:rPr>
+              <a:t>均為檢察官於偵查中主動函詢國稅局所製作</a:t>
+            </a:r>
+          </a:p>
+          <a:p>
+            <a:pPr algn="l"/>
+            <a:r>
+              <a:rPr sz="1700" b="0">
+                <a:solidFill>
+                  <a:srgbClr val="333333"/>
+                </a:solidFill>
+                <a:latin typeface="Times New Roman"/>
+                <a:ea typeface="標楷體"/>
+              </a:rPr>
+              <a:t>• </a:t>
+            </a:r>
+            <a:r>
+              <a:rPr sz="1700" b="0">
+                <a:solidFill>
+                  <a:srgbClr val="333333"/>
+                </a:solidFill>
+                <a:latin typeface="Times New Roman"/>
+                <a:ea typeface="標楷體"/>
+              </a:rPr>
+              <a:t>屬刑訴§159 第 1 項「被告以外之人於審判外之書面陳述」</a:t>
+            </a:r>
+          </a:p>
+        </p:txBody>
+      </p:sp>
+      <p:sp>
+        <p:nvSpPr>
+          <p:cNvPr id="7" name="TextBox 6"/>
+          <p:cNvSpPr txBox="1"/>
+          <p:nvPr/>
+        </p:nvSpPr>
+        <p:spPr>
+          <a:xfrm>
+            <a:off x="731520" y="3291840"/>
+            <a:ext cx="10972800" cy="411480"/>
+          </a:xfrm>
+          <a:prstGeom prst="rect">
+            <a:avLst/>
+          </a:prstGeom>
+          <a:noFill/>
+        </p:spPr>
+        <p:txBody>
+          <a:bodyPr wrap="square" anchor="t" lIns="45720" rIns="45720" tIns="18288" bIns="18288">
+            <a:spAutoFit/>
+          </a:bodyPr>
+          <a:lstStyle/>
+          <a:p>
+            <a:pPr algn="l"/>
+            <a:r>
+              <a:rPr sz="1800" b="1">
+                <a:solidFill>
+                  <a:srgbClr val="8B0000"/>
+                </a:solidFill>
+                <a:latin typeface="Times New Roman"/>
+                <a:ea typeface="標楷體"/>
+              </a:rPr>
+              <a:t>關鍵事實</a:t>
+            </a:r>
+          </a:p>
+        </p:txBody>
+      </p:sp>
+      <p:sp>
+        <p:nvSpPr>
+          <p:cNvPr id="8" name="TextBox 7"/>
+          <p:cNvSpPr txBox="1"/>
+          <p:nvPr/>
+        </p:nvSpPr>
+        <p:spPr>
+          <a:xfrm>
+            <a:off x="914400" y="3703320"/>
+            <a:ext cx="10789920" cy="1508760"/>
+          </a:xfrm>
+          <a:prstGeom prst="rect">
+            <a:avLst/>
+          </a:prstGeom>
+          <a:noFill/>
+        </p:spPr>
+        <p:txBody>
+          <a:bodyPr wrap="square" anchor="t" lIns="45720" rIns="45720" tIns="18288" bIns="18288">
+            <a:spAutoFit/>
+          </a:bodyPr>
+          <a:lstStyle/>
+          <a:p>
+            <a:pPr algn="l"/>
+            <a:r>
+              <a:rPr sz="1700" b="0">
+                <a:solidFill>
+                  <a:srgbClr val="333333"/>
+                </a:solidFill>
+                <a:latin typeface="Times New Roman"/>
+                <a:ea typeface="標楷體"/>
+              </a:rPr>
+              <a:t>• </a:t>
+            </a:r>
+            <a:r>
+              <a:rPr sz="1700" b="0">
+                <a:solidFill>
+                  <a:srgbClr val="333333"/>
+                </a:solidFill>
+                <a:latin typeface="Times New Roman"/>
+                <a:ea typeface="標楷體"/>
+              </a:rPr>
+              <a:t>國稅局 113.12.16 函（原件 ④）：國稅局自身稅務調查尚未開始，即已先應檢方要求製作推估表</a:t>
+            </a:r>
+          </a:p>
+          <a:p>
+            <a:pPr algn="l"/>
+            <a:r>
+              <a:rPr sz="1700" b="0">
+                <a:solidFill>
+                  <a:srgbClr val="333333"/>
+                </a:solidFill>
+                <a:latin typeface="Times New Roman"/>
+                <a:ea typeface="標楷體"/>
+              </a:rPr>
+              <a:t>• </a:t>
+            </a:r>
+            <a:r>
+              <a:rPr sz="1700" b="0">
+                <a:solidFill>
+                  <a:srgbClr val="333333"/>
+                </a:solidFill>
+                <a:latin typeface="Times New Roman"/>
+                <a:ea typeface="標楷體"/>
+              </a:rPr>
+              <a:t>→ 推估表（原件 ③）並非國稅局依職權調查的結果，而是「專為訴追而製作」</a:t>
+            </a:r>
+          </a:p>
+          <a:p>
+            <a:pPr algn="l"/>
+            <a:r>
+              <a:rPr sz="1700" b="0">
+                <a:solidFill>
+                  <a:srgbClr val="333333"/>
+                </a:solidFill>
+                <a:latin typeface="Times New Roman"/>
+                <a:ea typeface="標楷體"/>
+              </a:rPr>
+              <a:t>• </a:t>
+            </a:r>
+            <a:r>
+              <a:rPr sz="1700" b="0">
+                <a:solidFill>
+                  <a:srgbClr val="333333"/>
+                </a:solidFill>
+                <a:latin typeface="Times New Roman"/>
+                <a:ea typeface="標楷體"/>
+              </a:rPr>
+              <a:t>檢方至少 3 次發函指示國稅局修改計算方式（原件 ② ⑤ ⑥），表示稅額計算過程存有疑問須更正</a:t>
+            </a:r>
+          </a:p>
+        </p:txBody>
+      </p:sp>
+      <p:sp>
+        <p:nvSpPr>
+          <p:cNvPr id="9" name="TextBox 8"/>
+          <p:cNvSpPr txBox="1"/>
+          <p:nvPr/>
+        </p:nvSpPr>
+        <p:spPr>
+          <a:xfrm>
+            <a:off x="10789920" y="6446520"/>
+            <a:ext cx="1097280" cy="320040"/>
+          </a:xfrm>
+          <a:prstGeom prst="rect">
+            <a:avLst/>
+          </a:prstGeom>
+          <a:noFill/>
+        </p:spPr>
+        <p:txBody>
+          <a:bodyPr wrap="square" anchor="t" lIns="45720" rIns="45720" tIns="18288" bIns="18288">
+            <a:spAutoFit/>
+          </a:bodyPr>
+          <a:lstStyle/>
+          <a:p>
+            <a:pPr algn="r"/>
+            <a:r>
+              <a:rPr sz="900" b="0">
+                <a:solidFill>
+                  <a:srgbClr val="666666"/>
+                </a:solidFill>
+                <a:latin typeface="Times New Roman"/>
+                <a:ea typeface="標楷體"/>
+              </a:rPr>
+              <a:t>3</a:t>
             </a:r>
           </a:p>
         </p:txBody>
@@ -3563,258 +4210,218 @@
       <p:grpSpPr/>
       <p:sp>
         <p:nvSpPr>
-          <p:cNvPr id="2" name="TextBox 1"/>
+          <p:cNvPr id="2" name="Rectangle 1"/>
+          <p:cNvSpPr/>
+          <p:nvPr/>
+        </p:nvSpPr>
+        <p:spPr>
+          <a:xfrm>
+            <a:off x="0" y="0"/>
+            <a:ext cx="73152" cy="6858000"/>
+          </a:xfrm>
+          <a:prstGeom prst="rect">
+            <a:avLst/>
+          </a:prstGeom>
+          <a:solidFill>
+            <a:srgbClr val="1A3C6E"/>
+          </a:solidFill>
+          <a:ln>
+            <a:noFill/>
+          </a:ln>
+        </p:spPr>
+        <p:style>
+          <a:lnRef idx="1">
+            <a:schemeClr val="accent1"/>
+          </a:lnRef>
+          <a:fillRef idx="3">
+            <a:schemeClr val="accent1"/>
+          </a:fillRef>
+          <a:effectRef idx="2">
+            <a:schemeClr val="accent1"/>
+          </a:effectRef>
+          <a:fontRef idx="minor">
+            <a:schemeClr val="lt1"/>
+          </a:fontRef>
+        </p:style>
+        <p:txBody>
+          <a:bodyPr rtlCol="0" anchor="ctr"/>
+          <a:lstStyle/>
+          <a:p>
+            <a:pPr algn="ctr"/>
+          </a:p>
+        </p:txBody>
+      </p:sp>
+      <p:sp>
+        <p:nvSpPr>
+          <p:cNvPr id="3" name="TextBox 2"/>
           <p:cNvSpPr txBox="1"/>
           <p:nvPr/>
         </p:nvSpPr>
         <p:spPr>
           <a:xfrm>
-            <a:off x="548640" y="457200"/>
-            <a:ext cx="11094415" cy="365760"/>
+            <a:off x="548640" y="228600"/>
+            <a:ext cx="10972800" cy="731520"/>
           </a:xfrm>
           <a:prstGeom prst="rect">
             <a:avLst/>
           </a:prstGeom>
           <a:noFill/>
+        </p:spPr>
+        <p:txBody>
+          <a:bodyPr wrap="square" anchor="t" lIns="45720" rIns="45720" tIns="18288" bIns="18288">
+            <a:spAutoFit/>
+          </a:bodyPr>
+          <a:lstStyle/>
+          <a:p>
+            <a:pPr algn="l"/>
+            <a:r>
+              <a:rPr sz="2600" b="1">
+                <a:solidFill>
+                  <a:srgbClr val="1A3C6E"/>
+                </a:solidFill>
+                <a:latin typeface="Times New Roman"/>
+                <a:ea typeface="標楷體"/>
+              </a:rPr>
+              <a:t>卷證原件 ① 113.8.16 — 國稅局復函</a:t>
+            </a:r>
+          </a:p>
+        </p:txBody>
+      </p:sp>
+      <p:sp>
+        <p:nvSpPr>
+          <p:cNvPr id="4" name="Rectangle 3"/>
+          <p:cNvSpPr/>
+          <p:nvPr/>
+        </p:nvSpPr>
+        <p:spPr>
+          <a:xfrm>
+            <a:off x="548640" y="914400"/>
+            <a:ext cx="10972800" cy="18288"/>
+          </a:xfrm>
+          <a:prstGeom prst="rect">
+            <a:avLst/>
+          </a:prstGeom>
+          <a:solidFill>
+            <a:srgbClr val="1A3C6E"/>
+          </a:solidFill>
           <a:ln>
             <a:noFill/>
           </a:ln>
         </p:spPr>
-        <p:txBody>
-          <a:bodyPr wrap="square" anchor="t" lIns="0" rIns="0" tIns="0" bIns="0">
-            <a:spAutoFit/>
-          </a:bodyPr>
-          <a:lstStyle/>
-          <a:p>
-            <a:pPr algn="l"/>
-            <a:r>
-              <a:rPr sz="1800" b="1">
-                <a:solidFill>
-                  <a:srgbClr val="4A6A9A"/>
-                </a:solidFill>
-                <a:latin typeface="標楷體"/>
-              </a:rPr>
-              <a:t>壹、犯後態度</a:t>
-            </a:r>
-          </a:p>
-        </p:txBody>
-      </p:sp>
-      <p:sp>
-        <p:nvSpPr>
-          <p:cNvPr id="3" name="TextBox 2"/>
+        <p:style>
+          <a:lnRef idx="1">
+            <a:schemeClr val="accent1"/>
+          </a:lnRef>
+          <a:fillRef idx="3">
+            <a:schemeClr val="accent1"/>
+          </a:fillRef>
+          <a:effectRef idx="2">
+            <a:schemeClr val="accent1"/>
+          </a:effectRef>
+          <a:fontRef idx="minor">
+            <a:schemeClr val="lt1"/>
+          </a:fontRef>
+        </p:style>
+        <p:txBody>
+          <a:bodyPr rtlCol="0" anchor="ctr"/>
+          <a:lstStyle/>
+          <a:p>
+            <a:pPr algn="ctr"/>
+          </a:p>
+        </p:txBody>
+      </p:sp>
+      <p:sp>
+        <p:nvSpPr>
+          <p:cNvPr id="5" name="TextBox 4"/>
           <p:cNvSpPr txBox="1"/>
           <p:nvPr/>
         </p:nvSpPr>
         <p:spPr>
           <a:xfrm>
-            <a:off x="548640" y="868680"/>
-            <a:ext cx="11094415" cy="640080"/>
+            <a:off x="731520" y="1097280"/>
+            <a:ext cx="10972800" cy="411480"/>
           </a:xfrm>
           <a:prstGeom prst="rect">
             <a:avLst/>
           </a:prstGeom>
           <a:noFill/>
-          <a:ln>
-            <a:noFill/>
-          </a:ln>
-        </p:spPr>
-        <p:txBody>
-          <a:bodyPr wrap="square" anchor="t" lIns="0" rIns="0" tIns="0" bIns="0">
+        </p:spPr>
+        <p:txBody>
+          <a:bodyPr wrap="square" anchor="t" lIns="45720" rIns="45720" tIns="18288" bIns="18288">
             <a:spAutoFit/>
           </a:bodyPr>
           <a:lstStyle/>
           <a:p>
             <a:pPr algn="l"/>
             <a:r>
-              <a:rPr sz="2800" b="1">
-                <a:solidFill>
-                  <a:srgbClr val="1F3A68"/>
-                </a:solidFill>
-                <a:latin typeface="標楷體"/>
-              </a:rPr>
-              <a:t>補繳稅額與配合調查</a:t>
-            </a:r>
-          </a:p>
-        </p:txBody>
-      </p:sp>
-      <p:cxnSp>
-        <p:nvCxnSpPr>
-          <p:cNvPr id="4" name="Connector 3"/>
-          <p:cNvCxnSpPr/>
+              <a:rPr sz="1600" b="1">
+                <a:solidFill>
+                  <a:srgbClr val="1A3C6E"/>
+                </a:solidFill>
+                <a:latin typeface="Times New Roman"/>
+                <a:ea typeface="標楷體"/>
+              </a:rPr>
+              <a:t>113偵27269卷5 p.253 — 財政部高雄國稅局 113.8.19 復函</a:t>
+            </a:r>
+          </a:p>
+        </p:txBody>
+      </p:sp>
+      <p:pic>
+        <p:nvPicPr>
+          <p:cNvPr id="6" name="Picture 5" descr="113偵27269卷5_p253_551ced8e.png"/>
+          <p:cNvPicPr>
+            <a:picLocks noChangeAspect="1"/>
+          </p:cNvPicPr>
           <p:nvPr/>
-        </p:nvCxnSpPr>
-        <p:spPr>
-          <a:xfrm>
-            <a:off x="548640" y="1554480"/>
-            <a:ext cx="11094415" cy="0"/>
-          </a:xfrm>
-          <a:prstGeom prst="line">
+        </p:nvPicPr>
+        <p:blipFill>
+          <a:blip r:embed="rId2"/>
+          <a:stretch>
+            <a:fillRect/>
+          </a:stretch>
+        </p:blipFill>
+        <p:spPr>
+          <a:xfrm>
+            <a:off x="5806440" y="1188720"/>
+            <a:ext cx="5897880" cy="4176405"/>
+          </a:xfrm>
+          <a:prstGeom prst="rect">
             <a:avLst/>
           </a:prstGeom>
-          <a:ln>
-            <a:solidFill>
-              <a:srgbClr val="C0C0C0"/>
-            </a:solidFill>
-          </a:ln>
-        </p:spPr>
-        <p:style>
-          <a:lnRef idx="2">
-            <a:schemeClr val="accent1"/>
-          </a:lnRef>
-          <a:fillRef idx="0">
-            <a:schemeClr val="accent1"/>
-          </a:fillRef>
-          <a:effectRef idx="1">
-            <a:schemeClr val="accent1"/>
-          </a:effectRef>
-          <a:fontRef idx="minor">
-            <a:schemeClr val="tx1"/>
-          </a:fontRef>
-        </p:style>
-      </p:cxnSp>
-      <p:sp>
-        <p:nvSpPr>
-          <p:cNvPr id="5" name="TextBox 4"/>
+        </p:spPr>
+      </p:pic>
+      <p:sp>
+        <p:nvSpPr>
+          <p:cNvPr id="7" name="TextBox 6"/>
           <p:cNvSpPr txBox="1"/>
           <p:nvPr/>
         </p:nvSpPr>
         <p:spPr>
           <a:xfrm>
-            <a:off x="548640" y="1737360"/>
-            <a:ext cx="11094415" cy="548640"/>
+            <a:off x="10789920" y="6446520"/>
+            <a:ext cx="1097280" cy="320040"/>
           </a:xfrm>
           <a:prstGeom prst="rect">
             <a:avLst/>
           </a:prstGeom>
           <a:noFill/>
-          <a:ln>
-            <a:noFill/>
-          </a:ln>
-        </p:spPr>
-        <p:txBody>
-          <a:bodyPr wrap="square" anchor="t" lIns="0" rIns="0" tIns="0" bIns="0">
+        </p:spPr>
+        <p:txBody>
+          <a:bodyPr wrap="square" anchor="t" lIns="45720" rIns="45720" tIns="18288" bIns="18288">
             <a:spAutoFit/>
           </a:bodyPr>
           <a:lstStyle/>
           <a:p>
-            <a:pPr algn="l"/>
-            <a:r>
-              <a:rPr sz="1800" b="1">
-                <a:solidFill>
-                  <a:srgbClr val="C08000"/>
-                </a:solidFill>
-                <a:latin typeface="標楷體"/>
-              </a:rPr>
-              <a:t>● 核心主張：</a:t>
-            </a:r>
-            <a:r>
-              <a:rPr sz="1800" b="0">
-                <a:solidFill>
-                  <a:srgbClr val="333333"/>
-                </a:solidFill>
-                <a:latin typeface="標楷體"/>
-              </a:rPr>
-              <a:t>被告犯後態度良好，已補繳稅款並配合調查。</a:t>
-            </a:r>
-          </a:p>
-        </p:txBody>
-      </p:sp>
-      <p:sp>
-        <p:nvSpPr>
-          <p:cNvPr id="6" name="TextBox 5"/>
-          <p:cNvSpPr txBox="1"/>
-          <p:nvPr/>
-        </p:nvSpPr>
-        <p:spPr>
-          <a:xfrm>
-            <a:off x="548640" y="2377440"/>
-            <a:ext cx="11094415" cy="2286000"/>
-          </a:xfrm>
-          <a:prstGeom prst="rect">
-            <a:avLst/>
-          </a:prstGeom>
-          <a:noFill/>
-          <a:ln>
-            <a:noFill/>
-          </a:ln>
-        </p:spPr>
-        <p:txBody>
-          <a:bodyPr wrap="square" anchor="t" lIns="0" rIns="0" tIns="0" bIns="0">
-            <a:spAutoFit/>
-          </a:bodyPr>
-          <a:lstStyle/>
-          <a:p>
-            <a:pPr algn="l"/>
-            <a:r>
-              <a:rPr sz="1800" b="0">
-                <a:solidFill>
-                  <a:srgbClr val="333333"/>
-                </a:solidFill>
-                <a:latin typeface="標楷體"/>
-              </a:rPr>
-              <a:t>・被告於偵查中即補繳稅款 1.35 億元</a:t>
-            </a:r>
-          </a:p>
-          <a:p>
-            <a:pPr algn="l"/>
-            <a:r>
-              <a:rPr sz="1800" b="0">
-                <a:solidFill>
-                  <a:srgbClr val="333333"/>
-                </a:solidFill>
-                <a:latin typeface="標楷體"/>
-              </a:rPr>
-              <a:t>・出具行政陳述書（詳卷）</a:t>
-            </a:r>
-          </a:p>
-          <a:p>
-            <a:pPr algn="l"/>
-            <a:r>
-              <a:rPr sz="1800" b="0">
-                <a:solidFill>
-                  <a:srgbClr val="333333"/>
-                </a:solidFill>
-                <a:latin typeface="標楷體"/>
-              </a:rPr>
-              <a:t>・帳冊金流紀錄無保留提供</a:t>
-            </a:r>
-          </a:p>
-        </p:txBody>
-      </p:sp>
-      <p:sp>
-        <p:nvSpPr>
-          <p:cNvPr id="7" name="TextBox 6"/>
-          <p:cNvSpPr txBox="1"/>
-          <p:nvPr/>
-        </p:nvSpPr>
-        <p:spPr>
-          <a:xfrm>
-            <a:off x="548640" y="5943600"/>
-            <a:ext cx="11094415" cy="365760"/>
-          </a:xfrm>
-          <a:prstGeom prst="rect">
-            <a:avLst/>
-          </a:prstGeom>
-          <a:noFill/>
-          <a:ln>
-            <a:noFill/>
-          </a:ln>
-        </p:spPr>
-        <p:txBody>
-          <a:bodyPr wrap="square" anchor="t" lIns="0" rIns="0" tIns="0" bIns="0">
-            <a:spAutoFit/>
-          </a:bodyPr>
-          <a:lstStyle/>
-          <a:p>
-            <a:pPr algn="l"/>
-            <a:r>
-              <a:rPr sz="1000" b="0">
-                <a:solidFill>
-                  <a:srgbClr val="4A6A9A"/>
-                </a:solidFill>
-                <a:latin typeface="標楷體"/>
-              </a:rPr>
-              <a:t>卷證出處：115 金重訴 1 號卷第 187 頁（即起訴書第 175 頁）</a:t>
+            <a:pPr algn="r"/>
+            <a:r>
+              <a:rPr sz="900" b="0">
+                <a:solidFill>
+                  <a:srgbClr val="666666"/>
+                </a:solidFill>
+                <a:latin typeface="Times New Roman"/>
+                <a:ea typeface="標楷體"/>
+              </a:rPr>
+              <a:t>4</a:t>
             </a:r>
           </a:p>
         </p:txBody>
@@ -3833,7 +4440,7 @@
     <p:bg>
       <p:bgPr>
         <a:solidFill>
-          <a:srgbClr val="1F3A68"/>
+          <a:srgbClr val="FFFFFF"/>
         </a:solidFill>
         <a:effectLst/>
       </p:bgPr>
@@ -3847,38 +4454,368 @@
       <p:grpSpPr/>
       <p:sp>
         <p:nvSpPr>
-          <p:cNvPr id="2" name="TextBox 1"/>
+          <p:cNvPr id="2" name="Rectangle 1"/>
+          <p:cNvSpPr/>
+          <p:nvPr/>
+        </p:nvSpPr>
+        <p:spPr>
+          <a:xfrm>
+            <a:off x="0" y="0"/>
+            <a:ext cx="73152" cy="6858000"/>
+          </a:xfrm>
+          <a:prstGeom prst="rect">
+            <a:avLst/>
+          </a:prstGeom>
+          <a:solidFill>
+            <a:srgbClr val="1A3C6E"/>
+          </a:solidFill>
+          <a:ln>
+            <a:noFill/>
+          </a:ln>
+        </p:spPr>
+        <p:style>
+          <a:lnRef idx="1">
+            <a:schemeClr val="accent1"/>
+          </a:lnRef>
+          <a:fillRef idx="3">
+            <a:schemeClr val="accent1"/>
+          </a:fillRef>
+          <a:effectRef idx="2">
+            <a:schemeClr val="accent1"/>
+          </a:effectRef>
+          <a:fontRef idx="minor">
+            <a:schemeClr val="lt1"/>
+          </a:fontRef>
+        </p:style>
+        <p:txBody>
+          <a:bodyPr rtlCol="0" anchor="ctr"/>
+          <a:lstStyle/>
+          <a:p>
+            <a:pPr algn="ctr"/>
+          </a:p>
+        </p:txBody>
+      </p:sp>
+      <p:sp>
+        <p:nvSpPr>
+          <p:cNvPr id="3" name="TextBox 2"/>
           <p:cNvSpPr txBox="1"/>
           <p:nvPr/>
         </p:nvSpPr>
         <p:spPr>
           <a:xfrm>
-            <a:off x="548640" y="2400300"/>
-            <a:ext cx="11094415" cy="2057400"/>
+            <a:off x="548640" y="228600"/>
+            <a:ext cx="10972800" cy="731520"/>
           </a:xfrm>
           <a:prstGeom prst="rect">
             <a:avLst/>
           </a:prstGeom>
           <a:noFill/>
+        </p:spPr>
+        <p:txBody>
+          <a:bodyPr wrap="square" anchor="t" lIns="45720" rIns="45720" tIns="18288" bIns="18288">
+            <a:spAutoFit/>
+          </a:bodyPr>
+          <a:lstStyle/>
+          <a:p>
+            <a:pPr algn="l"/>
+            <a:r>
+              <a:rPr sz="3000" b="1">
+                <a:solidFill>
+                  <a:srgbClr val="1A3C6E"/>
+                </a:solidFill>
+                <a:latin typeface="Times New Roman"/>
+                <a:ea typeface="標楷體"/>
+              </a:rPr>
+              <a:t>柒、所得性質爭議 — 合夥關係為真，不構成「詐術」</a:t>
+            </a:r>
+          </a:p>
+        </p:txBody>
+      </p:sp>
+      <p:sp>
+        <p:nvSpPr>
+          <p:cNvPr id="4" name="Rectangle 3"/>
+          <p:cNvSpPr/>
+          <p:nvPr/>
+        </p:nvSpPr>
+        <p:spPr>
+          <a:xfrm>
+            <a:off x="548640" y="914400"/>
+            <a:ext cx="10972800" cy="18288"/>
+          </a:xfrm>
+          <a:prstGeom prst="rect">
+            <a:avLst/>
+          </a:prstGeom>
+          <a:solidFill>
+            <a:srgbClr val="1A3C6E"/>
+          </a:solidFill>
           <a:ln>
             <a:noFill/>
           </a:ln>
         </p:spPr>
-        <p:txBody>
-          <a:bodyPr wrap="square" anchor="ctr" lIns="0" rIns="0" tIns="0" bIns="0">
+        <p:style>
+          <a:lnRef idx="1">
+            <a:schemeClr val="accent1"/>
+          </a:lnRef>
+          <a:fillRef idx="3">
+            <a:schemeClr val="accent1"/>
+          </a:fillRef>
+          <a:effectRef idx="2">
+            <a:schemeClr val="accent1"/>
+          </a:effectRef>
+          <a:fontRef idx="minor">
+            <a:schemeClr val="lt1"/>
+          </a:fontRef>
+        </p:style>
+        <p:txBody>
+          <a:bodyPr rtlCol="0" anchor="ctr"/>
+          <a:lstStyle/>
+          <a:p>
+            <a:pPr algn="ctr"/>
+          </a:p>
+        </p:txBody>
+      </p:sp>
+      <p:sp>
+        <p:nvSpPr>
+          <p:cNvPr id="5" name="TextBox 4"/>
+          <p:cNvSpPr txBox="1"/>
+          <p:nvPr/>
+        </p:nvSpPr>
+        <p:spPr>
+          <a:xfrm>
+            <a:off x="731520" y="1143000"/>
+            <a:ext cx="10972800" cy="411480"/>
+          </a:xfrm>
+          <a:prstGeom prst="rect">
+            <a:avLst/>
+          </a:prstGeom>
+          <a:noFill/>
+        </p:spPr>
+        <p:txBody>
+          <a:bodyPr wrap="square" anchor="t" lIns="45720" rIns="45720" tIns="18288" bIns="18288">
             <a:spAutoFit/>
           </a:bodyPr>
           <a:lstStyle/>
           <a:p>
-            <a:pPr algn="ctr"/>
-            <a:r>
-              <a:rPr sz="3600" b="1">
-                <a:solidFill>
-                  <a:srgbClr val="FFFFFF"/>
-                </a:solidFill>
-                <a:latin typeface="標楷體"/>
-              </a:rPr>
-              <a:t>參、重複課稅</a:t>
+            <a:pPr algn="l"/>
+            <a:r>
+              <a:rPr sz="1800" b="1">
+                <a:solidFill>
+                  <a:srgbClr val="8B0000"/>
+                </a:solidFill>
+                <a:latin typeface="Times New Roman"/>
+                <a:ea typeface="標楷體"/>
+              </a:rPr>
+              <a:t>核心主張</a:t>
+            </a:r>
+          </a:p>
+        </p:txBody>
+      </p:sp>
+      <p:sp>
+        <p:nvSpPr>
+          <p:cNvPr id="6" name="TextBox 5"/>
+          <p:cNvSpPr txBox="1"/>
+          <p:nvPr/>
+        </p:nvSpPr>
+        <p:spPr>
+          <a:xfrm>
+            <a:off x="914400" y="1554480"/>
+            <a:ext cx="10789920" cy="1097280"/>
+          </a:xfrm>
+          <a:prstGeom prst="rect">
+            <a:avLst/>
+          </a:prstGeom>
+          <a:noFill/>
+        </p:spPr>
+        <p:txBody>
+          <a:bodyPr wrap="square" anchor="t" lIns="45720" rIns="45720" tIns="18288" bIns="18288">
+            <a:spAutoFit/>
+          </a:bodyPr>
+          <a:lstStyle/>
+          <a:p>
+            <a:pPr algn="l"/>
+            <a:r>
+              <a:rPr sz="1700" b="0">
+                <a:solidFill>
+                  <a:srgbClr val="333333"/>
+                </a:solidFill>
+                <a:latin typeface="Times New Roman"/>
+                <a:ea typeface="標楷體"/>
+              </a:rPr>
+              <a:t>• </a:t>
+            </a:r>
+            <a:r>
+              <a:rPr sz="1700" b="0">
+                <a:solidFill>
+                  <a:srgbClr val="333333"/>
+                </a:solidFill>
+                <a:latin typeface="Times New Roman"/>
+                <a:ea typeface="標楷體"/>
+              </a:rPr>
+              <a:t>醫師與診所間為合夥關係，非僱傭</a:t>
+            </a:r>
+          </a:p>
+          <a:p>
+            <a:pPr algn="l"/>
+            <a:r>
+              <a:rPr sz="1700" b="0">
+                <a:solidFill>
+                  <a:srgbClr val="333333"/>
+                </a:solidFill>
+                <a:latin typeface="Times New Roman"/>
+                <a:ea typeface="標楷體"/>
+              </a:rPr>
+              <a:t>• </a:t>
+            </a:r>
+            <a:r>
+              <a:rPr sz="1700" b="0">
+                <a:solidFill>
+                  <a:srgbClr val="333333"/>
+                </a:solidFill>
+                <a:latin typeface="Times New Roman"/>
+                <a:ea typeface="標楷體"/>
+              </a:rPr>
+              <a:t>共負盈虧、自由排班、親自履行、不受指揮監督</a:t>
+            </a:r>
+          </a:p>
+        </p:txBody>
+      </p:sp>
+      <p:sp>
+        <p:nvSpPr>
+          <p:cNvPr id="7" name="TextBox 6"/>
+          <p:cNvSpPr txBox="1"/>
+          <p:nvPr/>
+        </p:nvSpPr>
+        <p:spPr>
+          <a:xfrm>
+            <a:off x="731520" y="2880360"/>
+            <a:ext cx="10972800" cy="411480"/>
+          </a:xfrm>
+          <a:prstGeom prst="rect">
+            <a:avLst/>
+          </a:prstGeom>
+          <a:noFill/>
+        </p:spPr>
+        <p:txBody>
+          <a:bodyPr wrap="square" anchor="t" lIns="45720" rIns="45720" tIns="18288" bIns="18288">
+            <a:spAutoFit/>
+          </a:bodyPr>
+          <a:lstStyle/>
+          <a:p>
+            <a:pPr algn="l"/>
+            <a:r>
+              <a:rPr sz="1800" b="1">
+                <a:solidFill>
+                  <a:srgbClr val="8B0000"/>
+                </a:solidFill>
+                <a:latin typeface="Times New Roman"/>
+                <a:ea typeface="標楷體"/>
+              </a:rPr>
+              <a:t>相關判決</a:t>
+            </a:r>
+          </a:p>
+        </p:txBody>
+      </p:sp>
+      <p:sp>
+        <p:nvSpPr>
+          <p:cNvPr id="8" name="TextBox 7"/>
+          <p:cNvSpPr txBox="1"/>
+          <p:nvPr/>
+        </p:nvSpPr>
+        <p:spPr>
+          <a:xfrm>
+            <a:off x="914400" y="3291840"/>
+            <a:ext cx="10789920" cy="1097280"/>
+          </a:xfrm>
+          <a:prstGeom prst="rect">
+            <a:avLst/>
+          </a:prstGeom>
+          <a:noFill/>
+        </p:spPr>
+        <p:txBody>
+          <a:bodyPr wrap="square" anchor="t" lIns="45720" rIns="45720" tIns="18288" bIns="18288">
+            <a:spAutoFit/>
+          </a:bodyPr>
+          <a:lstStyle/>
+          <a:p>
+            <a:pPr algn="l"/>
+            <a:r>
+              <a:rPr sz="1700" b="0">
+                <a:solidFill>
+                  <a:srgbClr val="333333"/>
+                </a:solidFill>
+                <a:latin typeface="Times New Roman"/>
+                <a:ea typeface="標楷體"/>
+              </a:rPr>
+              <a:t>• </a:t>
+            </a:r>
+            <a:r>
+              <a:rPr sz="1700" b="0">
+                <a:solidFill>
+                  <a:srgbClr val="333333"/>
+                </a:solidFill>
+                <a:latin typeface="Times New Roman"/>
+                <a:ea typeface="標楷體"/>
+              </a:rPr>
+              <a:t>最高行政法院 107 年度判字第 369 號判決：核課事實之舉證責任</a:t>
+            </a:r>
+          </a:p>
+          <a:p>
+            <a:pPr algn="l"/>
+            <a:r>
+              <a:rPr sz="1700" b="0">
+                <a:solidFill>
+                  <a:srgbClr val="333333"/>
+                </a:solidFill>
+                <a:latin typeface="Times New Roman"/>
+                <a:ea typeface="標楷體"/>
+              </a:rPr>
+              <a:t>• </a:t>
+            </a:r>
+            <a:r>
+              <a:rPr sz="1700" b="0">
+                <a:solidFill>
+                  <a:srgbClr val="333333"/>
+                </a:solidFill>
+                <a:latin typeface="Times New Roman"/>
+                <a:ea typeface="標楷體"/>
+              </a:rPr>
+              <a:t>最高行政法院 110 年度上字第 255 號判決：4 大從屬性判斷</a:t>
+            </a:r>
+          </a:p>
+        </p:txBody>
+      </p:sp>
+      <p:sp>
+        <p:nvSpPr>
+          <p:cNvPr id="9" name="TextBox 8"/>
+          <p:cNvSpPr txBox="1"/>
+          <p:nvPr/>
+        </p:nvSpPr>
+        <p:spPr>
+          <a:xfrm>
+            <a:off x="10789920" y="6446520"/>
+            <a:ext cx="1097280" cy="320040"/>
+          </a:xfrm>
+          <a:prstGeom prst="rect">
+            <a:avLst/>
+          </a:prstGeom>
+          <a:noFill/>
+        </p:spPr>
+        <p:txBody>
+          <a:bodyPr wrap="square" anchor="t" lIns="45720" rIns="45720" tIns="18288" bIns="18288">
+            <a:spAutoFit/>
+          </a:bodyPr>
+          <a:lstStyle/>
+          <a:p>
+            <a:pPr algn="r"/>
+            <a:r>
+              <a:rPr sz="900" b="0">
+                <a:solidFill>
+                  <a:srgbClr val="666666"/>
+                </a:solidFill>
+                <a:latin typeface="Times New Roman"/>
+                <a:ea typeface="標楷體"/>
+              </a:rPr>
+              <a:t>5</a:t>
             </a:r>
           </a:p>
         </p:txBody>
@@ -3911,319 +4848,218 @@
       <p:grpSpPr/>
       <p:sp>
         <p:nvSpPr>
-          <p:cNvPr id="2" name="TextBox 1"/>
+          <p:cNvPr id="2" name="Rectangle 1"/>
+          <p:cNvSpPr/>
+          <p:nvPr/>
+        </p:nvSpPr>
+        <p:spPr>
+          <a:xfrm>
+            <a:off x="0" y="0"/>
+            <a:ext cx="73152" cy="6858000"/>
+          </a:xfrm>
+          <a:prstGeom prst="rect">
+            <a:avLst/>
+          </a:prstGeom>
+          <a:solidFill>
+            <a:srgbClr val="1A3C6E"/>
+          </a:solidFill>
+          <a:ln>
+            <a:noFill/>
+          </a:ln>
+        </p:spPr>
+        <p:style>
+          <a:lnRef idx="1">
+            <a:schemeClr val="accent1"/>
+          </a:lnRef>
+          <a:fillRef idx="3">
+            <a:schemeClr val="accent1"/>
+          </a:fillRef>
+          <a:effectRef idx="2">
+            <a:schemeClr val="accent1"/>
+          </a:effectRef>
+          <a:fontRef idx="minor">
+            <a:schemeClr val="lt1"/>
+          </a:fontRef>
+        </p:style>
+        <p:txBody>
+          <a:bodyPr rtlCol="0" anchor="ctr"/>
+          <a:lstStyle/>
+          <a:p>
+            <a:pPr algn="ctr"/>
+          </a:p>
+        </p:txBody>
+      </p:sp>
+      <p:sp>
+        <p:nvSpPr>
+          <p:cNvPr id="3" name="TextBox 2"/>
           <p:cNvSpPr txBox="1"/>
           <p:nvPr/>
         </p:nvSpPr>
         <p:spPr>
           <a:xfrm>
-            <a:off x="548640" y="457200"/>
-            <a:ext cx="11094415" cy="365760"/>
+            <a:off x="548640" y="228600"/>
+            <a:ext cx="10972800" cy="731520"/>
           </a:xfrm>
           <a:prstGeom prst="rect">
             <a:avLst/>
           </a:prstGeom>
           <a:noFill/>
+        </p:spPr>
+        <p:txBody>
+          <a:bodyPr wrap="square" anchor="t" lIns="45720" rIns="45720" tIns="18288" bIns="18288">
+            <a:spAutoFit/>
+          </a:bodyPr>
+          <a:lstStyle/>
+          <a:p>
+            <a:pPr algn="l"/>
+            <a:r>
+              <a:rPr sz="2600" b="1">
+                <a:solidFill>
+                  <a:srgbClr val="1A3C6E"/>
+                </a:solidFill>
+                <a:latin typeface="Times New Roman"/>
+                <a:ea typeface="標楷體"/>
+              </a:rPr>
+              <a:t>柒附件 — 卷 17 聘任契約第 3 條</a:t>
+            </a:r>
+          </a:p>
+        </p:txBody>
+      </p:sp>
+      <p:sp>
+        <p:nvSpPr>
+          <p:cNvPr id="4" name="Rectangle 3"/>
+          <p:cNvSpPr/>
+          <p:nvPr/>
+        </p:nvSpPr>
+        <p:spPr>
+          <a:xfrm>
+            <a:off x="548640" y="914400"/>
+            <a:ext cx="10972800" cy="18288"/>
+          </a:xfrm>
+          <a:prstGeom prst="rect">
+            <a:avLst/>
+          </a:prstGeom>
+          <a:solidFill>
+            <a:srgbClr val="1A3C6E"/>
+          </a:solidFill>
           <a:ln>
             <a:noFill/>
           </a:ln>
         </p:spPr>
-        <p:txBody>
-          <a:bodyPr wrap="square" anchor="t" lIns="0" rIns="0" tIns="0" bIns="0">
-            <a:spAutoFit/>
-          </a:bodyPr>
-          <a:lstStyle/>
-          <a:p>
-            <a:pPr algn="l"/>
-            <a:r>
-              <a:rPr sz="1800" b="1">
-                <a:solidFill>
-                  <a:srgbClr val="4A6A9A"/>
-                </a:solidFill>
-                <a:latin typeface="標楷體"/>
-              </a:rPr>
-              <a:t>參、重複課稅</a:t>
-            </a:r>
-          </a:p>
-        </p:txBody>
-      </p:sp>
-      <p:sp>
-        <p:nvSpPr>
-          <p:cNvPr id="3" name="TextBox 2"/>
+        <p:style>
+          <a:lnRef idx="1">
+            <a:schemeClr val="accent1"/>
+          </a:lnRef>
+          <a:fillRef idx="3">
+            <a:schemeClr val="accent1"/>
+          </a:fillRef>
+          <a:effectRef idx="2">
+            <a:schemeClr val="accent1"/>
+          </a:effectRef>
+          <a:fontRef idx="minor">
+            <a:schemeClr val="lt1"/>
+          </a:fontRef>
+        </p:style>
+        <p:txBody>
+          <a:bodyPr rtlCol="0" anchor="ctr"/>
+          <a:lstStyle/>
+          <a:p>
+            <a:pPr algn="ctr"/>
+          </a:p>
+        </p:txBody>
+      </p:sp>
+      <p:sp>
+        <p:nvSpPr>
+          <p:cNvPr id="5" name="TextBox 4"/>
           <p:cNvSpPr txBox="1"/>
           <p:nvPr/>
         </p:nvSpPr>
         <p:spPr>
           <a:xfrm>
-            <a:off x="548640" y="868680"/>
-            <a:ext cx="11094415" cy="640080"/>
+            <a:off x="731520" y="1097280"/>
+            <a:ext cx="10972800" cy="411480"/>
           </a:xfrm>
           <a:prstGeom prst="rect">
             <a:avLst/>
           </a:prstGeom>
           <a:noFill/>
-          <a:ln>
-            <a:noFill/>
-          </a:ln>
-        </p:spPr>
-        <p:txBody>
-          <a:bodyPr wrap="square" anchor="t" lIns="0" rIns="0" tIns="0" bIns="0">
+        </p:spPr>
+        <p:txBody>
+          <a:bodyPr wrap="square" anchor="t" lIns="45720" rIns="45720" tIns="18288" bIns="18288">
             <a:spAutoFit/>
           </a:bodyPr>
           <a:lstStyle/>
           <a:p>
             <a:pPr algn="l"/>
             <a:r>
-              <a:rPr sz="2800" b="1">
-                <a:solidFill>
-                  <a:srgbClr val="1F3A68"/>
-                </a:solidFill>
-                <a:latin typeface="標楷體"/>
-              </a:rPr>
-              <a:t>國稅局計算公式內含重複課稅</a:t>
-            </a:r>
-          </a:p>
-        </p:txBody>
-      </p:sp>
-      <p:cxnSp>
-        <p:nvCxnSpPr>
-          <p:cNvPr id="4" name="Connector 3"/>
-          <p:cNvCxnSpPr/>
+              <a:rPr sz="1600" b="1">
+                <a:solidFill>
+                  <a:srgbClr val="1A3C6E"/>
+                </a:solidFill>
+                <a:latin typeface="Times New Roman"/>
+                <a:ea typeface="標楷體"/>
+              </a:rPr>
+              <a:t>113偵27269卷17 p.9 — 醫師聘任契約「醫師自負稅金成本」條款</a:t>
+            </a:r>
+          </a:p>
+        </p:txBody>
+      </p:sp>
+      <p:pic>
+        <p:nvPicPr>
+          <p:cNvPr id="6" name="Picture 5" descr="113偵27269卷17_p9_a422b16e.png"/>
+          <p:cNvPicPr>
+            <a:picLocks noChangeAspect="1"/>
+          </p:cNvPicPr>
           <p:nvPr/>
-        </p:nvCxnSpPr>
-        <p:spPr>
-          <a:xfrm>
-            <a:off x="548640" y="1554480"/>
-            <a:ext cx="11094415" cy="0"/>
-          </a:xfrm>
-          <a:prstGeom prst="line">
+        </p:nvPicPr>
+        <p:blipFill>
+          <a:blip r:embed="rId2"/>
+          <a:stretch>
+            <a:fillRect/>
+          </a:stretch>
+        </p:blipFill>
+        <p:spPr>
+          <a:xfrm>
+            <a:off x="5806440" y="1188720"/>
+            <a:ext cx="3751933" cy="5303520"/>
+          </a:xfrm>
+          <a:prstGeom prst="rect">
             <a:avLst/>
           </a:prstGeom>
-          <a:ln>
-            <a:solidFill>
-              <a:srgbClr val="C0C0C0"/>
-            </a:solidFill>
-          </a:ln>
-        </p:spPr>
-        <p:style>
-          <a:lnRef idx="2">
-            <a:schemeClr val="accent1"/>
-          </a:lnRef>
-          <a:fillRef idx="0">
-            <a:schemeClr val="accent1"/>
-          </a:fillRef>
-          <a:effectRef idx="1">
-            <a:schemeClr val="accent1"/>
-          </a:effectRef>
-          <a:fontRef idx="minor">
-            <a:schemeClr val="tx1"/>
-          </a:fontRef>
-        </p:style>
-      </p:cxnSp>
-      <p:sp>
-        <p:nvSpPr>
-          <p:cNvPr id="5" name="TextBox 4"/>
+        </p:spPr>
+      </p:pic>
+      <p:sp>
+        <p:nvSpPr>
+          <p:cNvPr id="7" name="TextBox 6"/>
           <p:cNvSpPr txBox="1"/>
           <p:nvPr/>
         </p:nvSpPr>
         <p:spPr>
           <a:xfrm>
-            <a:off x="548640" y="1737360"/>
-            <a:ext cx="11094415" cy="548640"/>
+            <a:off x="10789920" y="6446520"/>
+            <a:ext cx="1097280" cy="320040"/>
           </a:xfrm>
           <a:prstGeom prst="rect">
             <a:avLst/>
           </a:prstGeom>
           <a:noFill/>
-          <a:ln>
-            <a:noFill/>
-          </a:ln>
-        </p:spPr>
-        <p:txBody>
-          <a:bodyPr wrap="square" anchor="t" lIns="0" rIns="0" tIns="0" bIns="0">
+        </p:spPr>
+        <p:txBody>
+          <a:bodyPr wrap="square" anchor="t" lIns="45720" rIns="45720" tIns="18288" bIns="18288">
             <a:spAutoFit/>
           </a:bodyPr>
           <a:lstStyle/>
           <a:p>
-            <a:pPr algn="l"/>
-            <a:r>
-              <a:rPr sz="1800" b="1">
-                <a:solidFill>
-                  <a:srgbClr val="C08000"/>
-                </a:solidFill>
-                <a:latin typeface="標楷體"/>
-              </a:rPr>
-              <a:t>● 核心主張：</a:t>
-            </a:r>
-            <a:r>
-              <a:rPr sz="1800" b="0">
-                <a:solidFill>
-                  <a:srgbClr val="333333"/>
-                </a:solidFill>
-                <a:latin typeface="標楷體"/>
-              </a:rPr>
-              <a:t>同一自費收入同時認列薪資與執業所得，違反重複課稅禁止。</a:t>
-            </a:r>
-          </a:p>
-        </p:txBody>
-      </p:sp>
-      <p:sp>
-        <p:nvSpPr>
-          <p:cNvPr id="6" name="TextBox 5"/>
-          <p:cNvSpPr txBox="1"/>
-          <p:nvPr/>
-        </p:nvSpPr>
-        <p:spPr>
-          <a:xfrm>
-            <a:off x="548640" y="2377440"/>
-            <a:ext cx="11094415" cy="2286000"/>
-          </a:xfrm>
-          <a:prstGeom prst="rect">
-            <a:avLst/>
-          </a:prstGeom>
-          <a:noFill/>
-          <a:ln>
-            <a:noFill/>
-          </a:ln>
-        </p:spPr>
-        <p:txBody>
-          <a:bodyPr wrap="square" anchor="t" lIns="0" rIns="0" tIns="0" bIns="0">
-            <a:spAutoFit/>
-          </a:bodyPr>
-          <a:lstStyle/>
-          <a:p>
-            <a:pPr algn="l"/>
-            <a:r>
-              <a:rPr sz="1800" b="0">
-                <a:solidFill>
-                  <a:srgbClr val="333333"/>
-                </a:solidFill>
-                <a:latin typeface="標楷體"/>
-              </a:rPr>
-              <a:t>・附檔 A：醫師短漏薪資（含全部看診報酬）</a:t>
-            </a:r>
-          </a:p>
-          <a:p>
-            <a:pPr algn="l"/>
-            <a:r>
-              <a:rPr sz="1800" b="0">
-                <a:solidFill>
-                  <a:srgbClr val="333333"/>
-                </a:solidFill>
-                <a:latin typeface="標楷體"/>
-              </a:rPr>
-              <a:t>・附檔 C：推計執業所得（以同一自費收入）</a:t>
-            </a:r>
-          </a:p>
-          <a:p>
-            <a:pPr algn="l"/>
-            <a:r>
-              <a:rPr sz="1800" b="0">
-                <a:solidFill>
-                  <a:srgbClr val="333333"/>
-                </a:solidFill>
-                <a:latin typeface="標楷體"/>
-              </a:rPr>
-              <a:t>・兩者相加構成同一經濟活動雙重計入</a:t>
-            </a:r>
-          </a:p>
-        </p:txBody>
-      </p:sp>
-      <p:sp>
-        <p:nvSpPr>
-          <p:cNvPr id="7" name="TextBox 6"/>
-          <p:cNvSpPr txBox="1"/>
-          <p:nvPr/>
-        </p:nvSpPr>
-        <p:spPr>
-          <a:xfrm>
-            <a:off x="548640" y="4114800"/>
-            <a:ext cx="11094415" cy="1463040"/>
-          </a:xfrm>
-          <a:prstGeom prst="rect">
-            <a:avLst/>
-          </a:prstGeom>
-          <a:solidFill>
-            <a:srgbClr val="F5F2E8"/>
-          </a:solidFill>
-          <a:ln>
-            <a:noFill/>
-          </a:ln>
-        </p:spPr>
-        <p:txBody>
-          <a:bodyPr wrap="square" anchor="t" lIns="182880" rIns="182880" tIns="91440" bIns="91440">
-            <a:spAutoFit/>
-          </a:bodyPr>
-          <a:lstStyle/>
-          <a:p>
-            <a:pPr algn="l"/>
-            <a:r>
-              <a:rPr sz="1400" b="1">
-                <a:solidFill>
-                  <a:srgbClr val="1F3A68"/>
-                </a:solidFill>
-                <a:latin typeface="標楷體"/>
-              </a:rPr>
-              <a:t>最高行政法院 107 年度判字第 369 號判決（綜合所得稅）</a:t>
-            </a:r>
-            <a:r>
-              <a:rPr sz="1000" b="0">
-                <a:solidFill>
-                  <a:srgbClr val="1F3A68"/>
-                </a:solidFill>
-                <a:latin typeface="標楷體"/>
-              </a:rPr>
-              <a:t>  ✓ 已驗證</a:t>
-            </a:r>
-          </a:p>
-          <a:p>
-            <a:pPr algn="l"/>
-            <a:r>
-              <a:rPr sz="1400" b="0">
-                <a:solidFill>
-                  <a:srgbClr val="503A1E"/>
-                </a:solidFill>
-                <a:latin typeface="標楷體"/>
-              </a:rPr>
-              <a:t>「課稅之構成要件事實，多發生於納稅義務人所得支配之範圍，稅捐稽徵機關掌握困難，為貫徹公平合法課稅之目的，因而課納稅義務人申報協力義務……」</a:t>
-            </a:r>
-          </a:p>
-        </p:txBody>
-      </p:sp>
-      <p:sp>
-        <p:nvSpPr>
-          <p:cNvPr id="8" name="TextBox 7"/>
-          <p:cNvSpPr txBox="1"/>
-          <p:nvPr/>
-        </p:nvSpPr>
-        <p:spPr>
-          <a:xfrm>
-            <a:off x="548640" y="5943600"/>
-            <a:ext cx="11094415" cy="365760"/>
-          </a:xfrm>
-          <a:prstGeom prst="rect">
-            <a:avLst/>
-          </a:prstGeom>
-          <a:noFill/>
-          <a:ln>
-            <a:noFill/>
-          </a:ln>
-        </p:spPr>
-        <p:txBody>
-          <a:bodyPr wrap="square" anchor="t" lIns="0" rIns="0" tIns="0" bIns="0">
-            <a:spAutoFit/>
-          </a:bodyPr>
-          <a:lstStyle/>
-          <a:p>
-            <a:pPr algn="l"/>
-            <a:r>
-              <a:rPr sz="1000" b="0">
-                <a:solidFill>
-                  <a:srgbClr val="4A6A9A"/>
-                </a:solidFill>
-                <a:latin typeface="標楷體"/>
-              </a:rPr>
-              <a:t>卷證出處：115 金重訴 1 號卷第 80 頁（即起訴書第 68 頁）</a:t>
+            <a:pPr algn="r"/>
+            <a:r>
+              <a:rPr sz="900" b="0">
+                <a:solidFill>
+                  <a:srgbClr val="666666"/>
+                </a:solidFill>
+                <a:latin typeface="Times New Roman"/>
+                <a:ea typeface="標楷體"/>
+              </a:rPr>
+              <a:t>6</a:t>
             </a:r>
           </a:p>
         </p:txBody>
@@ -4242,7 +5078,7 @@
     <p:bg>
       <p:bgPr>
         <a:solidFill>
-          <a:srgbClr val="1F3A68"/>
+          <a:srgbClr val="FFFFFF"/>
         </a:solidFill>
         <a:effectLst/>
       </p:bgPr>
@@ -4256,38 +5092,250 @@
       <p:grpSpPr/>
       <p:sp>
         <p:nvSpPr>
-          <p:cNvPr id="2" name="TextBox 1"/>
+          <p:cNvPr id="2" name="Rectangle 1"/>
+          <p:cNvSpPr/>
+          <p:nvPr/>
+        </p:nvSpPr>
+        <p:spPr>
+          <a:xfrm>
+            <a:off x="0" y="0"/>
+            <a:ext cx="73152" cy="6858000"/>
+          </a:xfrm>
+          <a:prstGeom prst="rect">
+            <a:avLst/>
+          </a:prstGeom>
+          <a:solidFill>
+            <a:srgbClr val="1A3C6E"/>
+          </a:solidFill>
+          <a:ln>
+            <a:noFill/>
+          </a:ln>
+        </p:spPr>
+        <p:style>
+          <a:lnRef idx="1">
+            <a:schemeClr val="accent1"/>
+          </a:lnRef>
+          <a:fillRef idx="3">
+            <a:schemeClr val="accent1"/>
+          </a:fillRef>
+          <a:effectRef idx="2">
+            <a:schemeClr val="accent1"/>
+          </a:effectRef>
+          <a:fontRef idx="minor">
+            <a:schemeClr val="lt1"/>
+          </a:fontRef>
+        </p:style>
+        <p:txBody>
+          <a:bodyPr rtlCol="0" anchor="ctr"/>
+          <a:lstStyle/>
+          <a:p>
+            <a:pPr algn="ctr"/>
+          </a:p>
+        </p:txBody>
+      </p:sp>
+      <p:sp>
+        <p:nvSpPr>
+          <p:cNvPr id="3" name="TextBox 2"/>
           <p:cNvSpPr txBox="1"/>
           <p:nvPr/>
         </p:nvSpPr>
         <p:spPr>
           <a:xfrm>
-            <a:off x="548640" y="2400300"/>
-            <a:ext cx="11094415" cy="2057400"/>
+            <a:off x="548640" y="228600"/>
+            <a:ext cx="10972800" cy="731520"/>
           </a:xfrm>
           <a:prstGeom prst="rect">
             <a:avLst/>
           </a:prstGeom>
           <a:noFill/>
+        </p:spPr>
+        <p:txBody>
+          <a:bodyPr wrap="square" anchor="t" lIns="45720" rIns="45720" tIns="18288" bIns="18288">
+            <a:spAutoFit/>
+          </a:bodyPr>
+          <a:lstStyle/>
+          <a:p>
+            <a:pPr algn="l"/>
+            <a:r>
+              <a:rPr sz="3000" b="1">
+                <a:solidFill>
+                  <a:srgbClr val="1A3C6E"/>
+                </a:solidFill>
+                <a:latin typeface="Times New Roman"/>
+                <a:ea typeface="標楷體"/>
+              </a:rPr>
+              <a:t>結論</a:t>
+            </a:r>
+          </a:p>
+        </p:txBody>
+      </p:sp>
+      <p:sp>
+        <p:nvSpPr>
+          <p:cNvPr id="4" name="Rectangle 3"/>
+          <p:cNvSpPr/>
+          <p:nvPr/>
+        </p:nvSpPr>
+        <p:spPr>
+          <a:xfrm>
+            <a:off x="548640" y="914400"/>
+            <a:ext cx="10972800" cy="18288"/>
+          </a:xfrm>
+          <a:prstGeom prst="rect">
+            <a:avLst/>
+          </a:prstGeom>
+          <a:solidFill>
+            <a:srgbClr val="1A3C6E"/>
+          </a:solidFill>
           <a:ln>
             <a:noFill/>
           </a:ln>
         </p:spPr>
-        <p:txBody>
-          <a:bodyPr wrap="square" anchor="ctr" lIns="0" rIns="0" tIns="0" bIns="0">
+        <p:style>
+          <a:lnRef idx="1">
+            <a:schemeClr val="accent1"/>
+          </a:lnRef>
+          <a:fillRef idx="3">
+            <a:schemeClr val="accent1"/>
+          </a:fillRef>
+          <a:effectRef idx="2">
+            <a:schemeClr val="accent1"/>
+          </a:effectRef>
+          <a:fontRef idx="minor">
+            <a:schemeClr val="lt1"/>
+          </a:fontRef>
+        </p:style>
+        <p:txBody>
+          <a:bodyPr rtlCol="0" anchor="ctr"/>
+          <a:lstStyle/>
+          <a:p>
+            <a:pPr algn="ctr"/>
+          </a:p>
+        </p:txBody>
+      </p:sp>
+      <p:sp>
+        <p:nvSpPr>
+          <p:cNvPr id="5" name="TextBox 4"/>
+          <p:cNvSpPr txBox="1"/>
+          <p:nvPr/>
+        </p:nvSpPr>
+        <p:spPr>
+          <a:xfrm>
+            <a:off x="731520" y="1234440"/>
+            <a:ext cx="10972800" cy="5029200"/>
+          </a:xfrm>
+          <a:prstGeom prst="rect">
+            <a:avLst/>
+          </a:prstGeom>
+          <a:noFill/>
+        </p:spPr>
+        <p:txBody>
+          <a:bodyPr wrap="square" anchor="t" lIns="45720" rIns="45720" tIns="18288" bIns="18288">
             <a:spAutoFit/>
           </a:bodyPr>
           <a:lstStyle/>
           <a:p>
-            <a:pPr algn="ctr"/>
-            <a:r>
-              <a:rPr sz="3600" b="1">
-                <a:solidFill>
-                  <a:srgbClr val="FFFFFF"/>
-                </a:solidFill>
-                <a:latin typeface="標楷體"/>
-              </a:rPr>
-              <a:t>伍、核課期間</a:t>
+            <a:pPr algn="l"/>
+            <a:r>
+              <a:rPr sz="1700" b="1">
+                <a:solidFill>
+                  <a:srgbClr val="1A3C6E"/>
+                </a:solidFill>
+                <a:latin typeface="Times New Roman"/>
+                <a:ea typeface="標楷體"/>
+              </a:rPr>
+              <a:t>1. </a:t>
+            </a:r>
+            <a:r>
+              <a:rPr sz="1700" b="0">
+                <a:solidFill>
+                  <a:srgbClr val="333333"/>
+                </a:solidFill>
+                <a:latin typeface="Times New Roman"/>
+                <a:ea typeface="標楷體"/>
+              </a:rPr>
+              <a:t>被告均無罪</a:t>
+            </a:r>
+          </a:p>
+          <a:p>
+            <a:pPr algn="l"/>
+            <a:r>
+              <a:rPr sz="1700" b="1">
+                <a:solidFill>
+                  <a:srgbClr val="1A3C6E"/>
+                </a:solidFill>
+                <a:latin typeface="Times New Roman"/>
+                <a:ea typeface="標楷體"/>
+              </a:rPr>
+              <a:t>2. </a:t>
+            </a:r>
+            <a:r>
+              <a:rPr sz="1700" b="0">
+                <a:solidFill>
+                  <a:srgbClr val="333333"/>
+                </a:solidFill>
+                <a:latin typeface="Times New Roman"/>
+                <a:ea typeface="標楷體"/>
+              </a:rPr>
+              <a:t>退一步言，若認有罪，請審酌犯後態度從輕量刑</a:t>
+            </a:r>
+          </a:p>
+          <a:p>
+            <a:pPr algn="l"/>
+            <a:r>
+              <a:rPr sz="1700" b="1">
+                <a:solidFill>
+                  <a:srgbClr val="1A3C6E"/>
+                </a:solidFill>
+                <a:latin typeface="Times New Roman"/>
+                <a:ea typeface="標楷體"/>
+              </a:rPr>
+              <a:t>3. </a:t>
+            </a:r>
+            <a:r>
+              <a:rPr sz="1700" b="0">
+                <a:solidFill>
+                  <a:srgbClr val="333333"/>
+                </a:solidFill>
+                <a:latin typeface="Times New Roman"/>
+                <a:ea typeface="標楷體"/>
+              </a:rPr>
+              <a:t>請求調查：OO 函文原件、證人 OOO</a:t>
+            </a:r>
+          </a:p>
+        </p:txBody>
+      </p:sp>
+      <p:sp>
+        <p:nvSpPr>
+          <p:cNvPr id="6" name="TextBox 5"/>
+          <p:cNvSpPr txBox="1"/>
+          <p:nvPr/>
+        </p:nvSpPr>
+        <p:spPr>
+          <a:xfrm>
+            <a:off x="10789920" y="6446520"/>
+            <a:ext cx="1097280" cy="320040"/>
+          </a:xfrm>
+          <a:prstGeom prst="rect">
+            <a:avLst/>
+          </a:prstGeom>
+          <a:noFill/>
+        </p:spPr>
+        <p:txBody>
+          <a:bodyPr wrap="square" anchor="t" lIns="45720" rIns="45720" tIns="18288" bIns="18288">
+            <a:spAutoFit/>
+          </a:bodyPr>
+          <a:lstStyle/>
+          <a:p>
+            <a:pPr algn="r"/>
+            <a:r>
+              <a:rPr sz="900" b="0">
+                <a:solidFill>
+                  <a:srgbClr val="666666"/>
+                </a:solidFill>
+                <a:latin typeface="Times New Roman"/>
+                <a:ea typeface="標楷體"/>
+              </a:rPr>
+              <a:t>7</a:t>
             </a:r>
           </a:p>
         </p:txBody>
@@ -4320,407 +5368,233 @@
       <p:grpSpPr/>
       <p:sp>
         <p:nvSpPr>
-          <p:cNvPr id="2" name="TextBox 1"/>
+          <p:cNvPr id="2" name="Rectangle 1"/>
+          <p:cNvSpPr/>
+          <p:nvPr/>
+        </p:nvSpPr>
+        <p:spPr>
+          <a:xfrm>
+            <a:off x="0" y="0"/>
+            <a:ext cx="73152" cy="6858000"/>
+          </a:xfrm>
+          <a:prstGeom prst="rect">
+            <a:avLst/>
+          </a:prstGeom>
+          <a:solidFill>
+            <a:srgbClr val="1A3C6E"/>
+          </a:solidFill>
+          <a:ln>
+            <a:noFill/>
+          </a:ln>
+        </p:spPr>
+        <p:style>
+          <a:lnRef idx="1">
+            <a:schemeClr val="accent1"/>
+          </a:lnRef>
+          <a:fillRef idx="3">
+            <a:schemeClr val="accent1"/>
+          </a:fillRef>
+          <a:effectRef idx="2">
+            <a:schemeClr val="accent1"/>
+          </a:effectRef>
+          <a:fontRef idx="minor">
+            <a:schemeClr val="lt1"/>
+          </a:fontRef>
+        </p:style>
+        <p:txBody>
+          <a:bodyPr rtlCol="0" anchor="ctr"/>
+          <a:lstStyle/>
+          <a:p>
+            <a:pPr algn="ctr"/>
+          </a:p>
+        </p:txBody>
+      </p:sp>
+      <p:sp>
+        <p:nvSpPr>
+          <p:cNvPr id="3" name="TextBox 2"/>
           <p:cNvSpPr txBox="1"/>
           <p:nvPr/>
         </p:nvSpPr>
         <p:spPr>
           <a:xfrm>
-            <a:off x="548640" y="457200"/>
-            <a:ext cx="11094415" cy="365760"/>
+            <a:off x="548640" y="228600"/>
+            <a:ext cx="10972800" cy="731520"/>
           </a:xfrm>
           <a:prstGeom prst="rect">
             <a:avLst/>
           </a:prstGeom>
           <a:noFill/>
+        </p:spPr>
+        <p:txBody>
+          <a:bodyPr wrap="square" anchor="t" lIns="45720" rIns="45720" tIns="18288" bIns="18288">
+            <a:spAutoFit/>
+          </a:bodyPr>
+          <a:lstStyle/>
+          <a:p>
+            <a:pPr algn="l"/>
+            <a:r>
+              <a:rPr sz="3000" b="1">
+                <a:solidFill>
+                  <a:srgbClr val="1A3C6E"/>
+                </a:solidFill>
+                <a:latin typeface="Times New Roman"/>
+                <a:ea typeface="標楷體"/>
+              </a:rPr>
+              <a:t>附錄 — 本簡報引用判決（均經 dr-lawbot 驗證）</a:t>
+            </a:r>
+          </a:p>
+        </p:txBody>
+      </p:sp>
+      <p:sp>
+        <p:nvSpPr>
+          <p:cNvPr id="4" name="Rectangle 3"/>
+          <p:cNvSpPr/>
+          <p:nvPr/>
+        </p:nvSpPr>
+        <p:spPr>
+          <a:xfrm>
+            <a:off x="548640" y="914400"/>
+            <a:ext cx="10972800" cy="18288"/>
+          </a:xfrm>
+          <a:prstGeom prst="rect">
+            <a:avLst/>
+          </a:prstGeom>
+          <a:solidFill>
+            <a:srgbClr val="1A3C6E"/>
+          </a:solidFill>
           <a:ln>
             <a:noFill/>
           </a:ln>
         </p:spPr>
-        <p:txBody>
-          <a:bodyPr wrap="square" anchor="t" lIns="0" rIns="0" tIns="0" bIns="0">
-            <a:spAutoFit/>
-          </a:bodyPr>
-          <a:lstStyle/>
-          <a:p>
-            <a:pPr algn="l"/>
-            <a:r>
-              <a:rPr sz="1800" b="1">
-                <a:solidFill>
-                  <a:srgbClr val="4A6A9A"/>
-                </a:solidFill>
-                <a:latin typeface="標楷體"/>
-              </a:rPr>
-              <a:t>伍、核課期間</a:t>
-            </a:r>
-          </a:p>
-        </p:txBody>
-      </p:sp>
-      <p:sp>
-        <p:nvSpPr>
-          <p:cNvPr id="3" name="TextBox 2"/>
+        <p:style>
+          <a:lnRef idx="1">
+            <a:schemeClr val="accent1"/>
+          </a:lnRef>
+          <a:fillRef idx="3">
+            <a:schemeClr val="accent1"/>
+          </a:fillRef>
+          <a:effectRef idx="2">
+            <a:schemeClr val="accent1"/>
+          </a:effectRef>
+          <a:fontRef idx="minor">
+            <a:schemeClr val="lt1"/>
+          </a:fontRef>
+        </p:style>
+        <p:txBody>
+          <a:bodyPr rtlCol="0" anchor="ctr"/>
+          <a:lstStyle/>
+          <a:p>
+            <a:pPr algn="ctr"/>
+          </a:p>
+        </p:txBody>
+      </p:sp>
+      <p:sp>
+        <p:nvSpPr>
+          <p:cNvPr id="5" name="TextBox 4"/>
           <p:cNvSpPr txBox="1"/>
           <p:nvPr/>
         </p:nvSpPr>
         <p:spPr>
           <a:xfrm>
-            <a:off x="548640" y="868680"/>
-            <a:ext cx="11094415" cy="640080"/>
+            <a:off x="731520" y="1234440"/>
+            <a:ext cx="10972800" cy="5029200"/>
           </a:xfrm>
           <a:prstGeom prst="rect">
             <a:avLst/>
           </a:prstGeom>
           <a:noFill/>
-          <a:ln>
-            <a:noFill/>
-          </a:ln>
-        </p:spPr>
-        <p:txBody>
-          <a:bodyPr wrap="square" anchor="t" lIns="0" rIns="0" tIns="0" bIns="0">
+        </p:spPr>
+        <p:txBody>
+          <a:bodyPr wrap="square" anchor="t" lIns="45720" rIns="45720" tIns="18288" bIns="18288">
             <a:spAutoFit/>
           </a:bodyPr>
           <a:lstStyle/>
           <a:p>
             <a:pPr algn="l"/>
             <a:r>
-              <a:rPr sz="2800" b="1">
-                <a:solidFill>
-                  <a:srgbClr val="1F3A68"/>
-                </a:solidFill>
-                <a:latin typeface="標楷體"/>
-              </a:rPr>
-              <a:t>原處分已逾 5 年核課期間</a:t>
-            </a:r>
-          </a:p>
-        </p:txBody>
-      </p:sp>
-      <p:cxnSp>
-        <p:nvCxnSpPr>
-          <p:cNvPr id="4" name="Connector 3"/>
-          <p:cNvCxnSpPr/>
-          <p:nvPr/>
-        </p:nvCxnSpPr>
-        <p:spPr>
-          <a:xfrm>
-            <a:off x="548640" y="1554480"/>
-            <a:ext cx="11094415" cy="0"/>
-          </a:xfrm>
-          <a:prstGeom prst="line">
-            <a:avLst/>
-          </a:prstGeom>
-          <a:ln>
-            <a:solidFill>
-              <a:srgbClr val="C0C0C0"/>
-            </a:solidFill>
-          </a:ln>
-        </p:spPr>
-        <p:style>
-          <a:lnRef idx="2">
-            <a:schemeClr val="accent1"/>
-          </a:lnRef>
-          <a:fillRef idx="0">
-            <a:schemeClr val="accent1"/>
-          </a:fillRef>
-          <a:effectRef idx="1">
-            <a:schemeClr val="accent1"/>
-          </a:effectRef>
-          <a:fontRef idx="minor">
-            <a:schemeClr val="tx1"/>
-          </a:fontRef>
-        </p:style>
-      </p:cxnSp>
-      <p:sp>
-        <p:nvSpPr>
-          <p:cNvPr id="5" name="TextBox 4"/>
+              <a:rPr sz="1400" b="0">
+                <a:solidFill>
+                  <a:srgbClr val="333333"/>
+                </a:solidFill>
+                <a:latin typeface="Times New Roman"/>
+                <a:ea typeface="標楷體"/>
+              </a:rPr>
+              <a:t>1. 最高行政法院 107 年度判字第 369 號判決（綜合所得稅）</a:t>
+            </a:r>
+          </a:p>
+          <a:p>
+            <a:pPr algn="l"/>
+            <a:r>
+              <a:rPr sz="1400" b="0">
+                <a:solidFill>
+                  <a:srgbClr val="666666"/>
+                </a:solidFill>
+                <a:latin typeface="Times New Roman"/>
+                <a:ea typeface="標楷體"/>
+              </a:rPr>
+              <a:t>    https://api.dr-lawbot.com/api/search?q=107+判字+369</a:t>
+            </a:r>
+          </a:p>
+          <a:p>
+            <a:pPr algn="l"/>
+            <a:r>
+              <a:rPr sz="1400" b="0">
+                <a:solidFill>
+                  <a:srgbClr val="333333"/>
+                </a:solidFill>
+                <a:latin typeface="Times New Roman"/>
+                <a:ea typeface="標楷體"/>
+              </a:rPr>
+              <a:t>2. 最高行政法院 110 年度上字第 255 號判決（勞動基準法）</a:t>
+            </a:r>
+          </a:p>
+          <a:p>
+            <a:pPr algn="l"/>
+            <a:r>
+              <a:rPr sz="1400" b="0">
+                <a:solidFill>
+                  <a:srgbClr val="666666"/>
+                </a:solidFill>
+                <a:latin typeface="Times New Roman"/>
+                <a:ea typeface="標楷體"/>
+              </a:rPr>
+              <a:t>    https://api.dr-lawbot.com/api/search?q=110+上字+255</a:t>
+            </a:r>
+          </a:p>
+        </p:txBody>
+      </p:sp>
+      <p:sp>
+        <p:nvSpPr>
+          <p:cNvPr id="6" name="TextBox 5"/>
           <p:cNvSpPr txBox="1"/>
           <p:nvPr/>
         </p:nvSpPr>
         <p:spPr>
           <a:xfrm>
-            <a:off x="548640" y="1737360"/>
-            <a:ext cx="11094415" cy="548640"/>
+            <a:off x="10789920" y="6446520"/>
+            <a:ext cx="1097280" cy="320040"/>
           </a:xfrm>
           <a:prstGeom prst="rect">
             <a:avLst/>
           </a:prstGeom>
           <a:noFill/>
-          <a:ln>
-            <a:noFill/>
-          </a:ln>
-        </p:spPr>
-        <p:txBody>
-          <a:bodyPr wrap="square" anchor="t" lIns="0" rIns="0" tIns="0" bIns="0">
+        </p:spPr>
+        <p:txBody>
+          <a:bodyPr wrap="square" anchor="t" lIns="45720" rIns="45720" tIns="18288" bIns="18288">
             <a:spAutoFit/>
           </a:bodyPr>
           <a:lstStyle/>
           <a:p>
-            <a:pPr algn="l"/>
-            <a:r>
-              <a:rPr sz="1800" b="1">
-                <a:solidFill>
-                  <a:srgbClr val="C08000"/>
-                </a:solidFill>
-                <a:latin typeface="標楷體"/>
-              </a:rPr>
-              <a:t>● 核心主張：</a:t>
-            </a:r>
-            <a:r>
-              <a:rPr sz="1800" b="0">
-                <a:solidFill>
-                  <a:srgbClr val="333333"/>
-                </a:solidFill>
-                <a:latin typeface="標楷體"/>
-              </a:rPr>
-              <a:t>舉證未達「幾近於真實之高度蓋然性」不得適用 7 年核課期間。</a:t>
-            </a:r>
-          </a:p>
-        </p:txBody>
-      </p:sp>
-      <p:sp>
-        <p:nvSpPr>
-          <p:cNvPr id="6" name="TextBox 5"/>
-          <p:cNvSpPr txBox="1"/>
-          <p:nvPr/>
-        </p:nvSpPr>
-        <p:spPr>
-          <a:xfrm>
-            <a:off x="548640" y="2377440"/>
-            <a:ext cx="11094415" cy="2286000"/>
-          </a:xfrm>
-          <a:prstGeom prst="rect">
-            <a:avLst/>
-          </a:prstGeom>
-          <a:noFill/>
-          <a:ln>
-            <a:noFill/>
-          </a:ln>
-        </p:spPr>
-        <p:txBody>
-          <a:bodyPr wrap="square" anchor="t" lIns="0" rIns="0" tIns="0" bIns="0">
-            <a:spAutoFit/>
-          </a:bodyPr>
-          <a:lstStyle/>
-          <a:p>
-            <a:pPr algn="l"/>
-            <a:r>
-              <a:rPr sz="1800" b="0">
-                <a:solidFill>
-                  <a:srgbClr val="333333"/>
-                </a:solidFill>
-                <a:latin typeface="標楷體"/>
-              </a:rPr>
-              <a:t>・109 年度扣繳申報期限：110 年 1 月底</a:t>
-            </a:r>
-          </a:p>
-          <a:p>
-            <a:pPr algn="l"/>
-            <a:r>
-              <a:rPr sz="1800" b="0">
-                <a:solidFill>
-                  <a:srgbClr val="333333"/>
-                </a:solidFill>
-                <a:latin typeface="標楷體"/>
-              </a:rPr>
-              <a:t>・5 年核課期間屆滿於 115 年 1 月底</a:t>
-            </a:r>
-          </a:p>
-          <a:p>
-            <a:pPr algn="l"/>
-            <a:r>
-              <a:rPr sz="1800" b="0">
-                <a:solidFill>
-                  <a:srgbClr val="333333"/>
-                </a:solidFill>
-                <a:latin typeface="標楷體"/>
-              </a:rPr>
-              <a:t>・原處分發文日 115 年 2 月 9 日，已逾期</a:t>
-            </a:r>
-          </a:p>
-        </p:txBody>
-      </p:sp>
-      <p:sp>
-        <p:nvSpPr>
-          <p:cNvPr id="7" name="TextBox 6"/>
-          <p:cNvSpPr txBox="1"/>
-          <p:nvPr/>
-        </p:nvSpPr>
-        <p:spPr>
-          <a:xfrm>
-            <a:off x="548640" y="4114800"/>
-            <a:ext cx="11094415" cy="1463040"/>
-          </a:xfrm>
-          <a:prstGeom prst="rect">
-            <a:avLst/>
-          </a:prstGeom>
-          <a:solidFill>
-            <a:srgbClr val="F5F2E8"/>
-          </a:solidFill>
-          <a:ln>
-            <a:noFill/>
-          </a:ln>
-        </p:spPr>
-        <p:txBody>
-          <a:bodyPr wrap="square" anchor="t" lIns="182880" rIns="182880" tIns="91440" bIns="91440">
-            <a:spAutoFit/>
-          </a:bodyPr>
-          <a:lstStyle/>
-          <a:p>
-            <a:pPr algn="l"/>
-            <a:r>
-              <a:rPr sz="1400" b="1">
-                <a:solidFill>
-                  <a:srgbClr val="1F3A68"/>
-                </a:solidFill>
-                <a:latin typeface="標楷體"/>
-              </a:rPr>
-              <a:t>最高行政法院 109 年度上字第 993 號判決（營業稅）</a:t>
-            </a:r>
-            <a:r>
-              <a:rPr sz="1000" b="0">
-                <a:solidFill>
-                  <a:srgbClr val="1F3A68"/>
-                </a:solidFill>
-                <a:latin typeface="標楷體"/>
-              </a:rPr>
-              <a:t>  ✓ 已驗證</a:t>
-            </a:r>
-          </a:p>
-          <a:p>
-            <a:pPr algn="l"/>
-            <a:r>
-              <a:rPr sz="1400" b="0">
-                <a:solidFill>
-                  <a:srgbClr val="503A1E"/>
-                </a:solidFill>
-                <a:latin typeface="標楷體"/>
-              </a:rPr>
-              <a:t>「稅捐稽徵機關就納稅義務人逃漏稅捐之要件事實負舉證責任，其證明程度須達「幾近於真實之高度蓋然性」……」</a:t>
-            </a:r>
-          </a:p>
-        </p:txBody>
-      </p:sp>
-    </p:spTree>
-  </p:cSld>
-  <p:clrMapOvr>
-    <a:masterClrMapping/>
-  </p:clrMapOvr>
-</p:sld>
-</file>
-
-<file path=ppt/slides/slide9.xml><?xml version="1.0" encoding="utf-8"?>
-<p:sld xmlns:a="http://schemas.openxmlformats.org/drawingml/2006/main" xmlns:p="http://schemas.openxmlformats.org/presentationml/2006/main" xmlns:r="http://schemas.openxmlformats.org/officeDocument/2006/relationships">
-  <p:cSld>
-    <p:bg>
-      <p:bgPr>
-        <a:solidFill>
-          <a:srgbClr val="FFFFFF"/>
-        </a:solidFill>
-        <a:effectLst/>
-      </p:bgPr>
-    </p:bg>
-    <p:spTree>
-      <p:nvGrpSpPr>
-        <p:cNvPr id="1" name=""/>
-        <p:cNvGrpSpPr/>
-        <p:nvPr/>
-      </p:nvGrpSpPr>
-      <p:grpSpPr/>
-      <p:sp>
-        <p:nvSpPr>
-          <p:cNvPr id="2" name="TextBox 1"/>
-          <p:cNvSpPr txBox="1"/>
-          <p:nvPr/>
-        </p:nvSpPr>
-        <p:spPr>
-          <a:xfrm>
-            <a:off x="548640" y="457200"/>
-            <a:ext cx="11094415" cy="731520"/>
-          </a:xfrm>
-          <a:prstGeom prst="rect">
-            <a:avLst/>
-          </a:prstGeom>
-          <a:noFill/>
-          <a:ln>
-            <a:noFill/>
-          </a:ln>
-        </p:spPr>
-        <p:txBody>
-          <a:bodyPr wrap="square" anchor="t" lIns="0" rIns="0" tIns="0" bIns="0">
-            <a:spAutoFit/>
-          </a:bodyPr>
-          <a:lstStyle/>
-          <a:p>
-            <a:pPr algn="l"/>
-            <a:r>
-              <a:rPr sz="2800" b="1">
-                <a:solidFill>
-                  <a:srgbClr val="1F3A68"/>
-                </a:solidFill>
-                <a:latin typeface="標楷體"/>
-              </a:rPr>
-              <a:t>結論與聲明</a:t>
-            </a:r>
-          </a:p>
-        </p:txBody>
-      </p:sp>
-      <p:sp>
-        <p:nvSpPr>
-          <p:cNvPr id="3" name="TextBox 2"/>
-          <p:cNvSpPr txBox="1"/>
-          <p:nvPr/>
-        </p:nvSpPr>
-        <p:spPr>
-          <a:xfrm>
-            <a:off x="548640" y="1554480"/>
-            <a:ext cx="11094415" cy="4572000"/>
-          </a:xfrm>
-          <a:prstGeom prst="rect">
-            <a:avLst/>
-          </a:prstGeom>
-          <a:noFill/>
-          <a:ln>
-            <a:noFill/>
-          </a:ln>
-        </p:spPr>
-        <p:txBody>
-          <a:bodyPr wrap="square" anchor="t" lIns="0" rIns="0" tIns="0" bIns="0">
-            <a:spAutoFit/>
-          </a:bodyPr>
-          <a:lstStyle/>
-          <a:p>
-            <a:pPr algn="l"/>
-            <a:r>
-              <a:rPr sz="1800" b="0">
-                <a:solidFill>
-                  <a:srgbClr val="333333"/>
-                </a:solidFill>
-                <a:latin typeface="標楷體"/>
-              </a:rPr>
-              <a:t>1. 被告無罪</a:t>
-            </a:r>
-          </a:p>
-          <a:p>
-            <a:pPr algn="l"/>
-            <a:r>
-              <a:rPr sz="1800" b="0">
-                <a:solidFill>
-                  <a:srgbClr val="333333"/>
-                </a:solidFill>
-                <a:latin typeface="標楷體"/>
-              </a:rPr>
-              <a:t>2. 退一步言，若認有罪，請審酌犯後態度從輕量刑</a:t>
-            </a:r>
-          </a:p>
-          <a:p>
-            <a:pPr algn="l"/>
-            <a:r>
-              <a:rPr sz="1800" b="0">
-                <a:solidFill>
-                  <a:srgbClr val="333333"/>
-                </a:solidFill>
-                <a:latin typeface="標楷體"/>
-              </a:rPr>
-              <a:t>3. 請求調查：OO 事項</a:t>
+            <a:pPr algn="r"/>
+            <a:r>
+              <a:rPr sz="900" b="0">
+                <a:solidFill>
+                  <a:srgbClr val="666666"/>
+                </a:solidFill>
+                <a:latin typeface="Times New Roman"/>
+                <a:ea typeface="標楷體"/>
+              </a:rPr>
+              <a:t>8</a:t>
             </a:r>
           </a:p>
         </p:txBody>
